--- a/slides.pptx
+++ b/slides.pptx
@@ -5,11 +5,29 @@
     <p:sldMasterId id="2147483708" r:id="rId1"/>
   </p:sldMasterIdLst>
   <p:notesMasterIdLst>
-    <p:notesMasterId r:id="rId4"/>
+    <p:notesMasterId r:id="rId22"/>
   </p:notesMasterIdLst>
   <p:sldIdLst>
     <p:sldId id="256" r:id="rId2"/>
     <p:sldId id="257" r:id="rId3"/>
+    <p:sldId id="269" r:id="rId4"/>
+    <p:sldId id="270" r:id="rId5"/>
+    <p:sldId id="271" r:id="rId6"/>
+    <p:sldId id="272" r:id="rId7"/>
+    <p:sldId id="261" r:id="rId8"/>
+    <p:sldId id="274" r:id="rId9"/>
+    <p:sldId id="273" r:id="rId10"/>
+    <p:sldId id="275" r:id="rId11"/>
+    <p:sldId id="276" r:id="rId12"/>
+    <p:sldId id="264" r:id="rId13"/>
+    <p:sldId id="277" r:id="rId14"/>
+    <p:sldId id="278" r:id="rId15"/>
+    <p:sldId id="279" r:id="rId16"/>
+    <p:sldId id="280" r:id="rId17"/>
+    <p:sldId id="281" r:id="rId18"/>
+    <p:sldId id="282" r:id="rId19"/>
+    <p:sldId id="283" r:id="rId20"/>
+    <p:sldId id="268" r:id="rId21"/>
   </p:sldIdLst>
   <p:sldSz cx="12192000" cy="6858000"/>
   <p:notesSz cx="6858000" cy="9144000"/>
@@ -108,6 +126,11 @@
       </a:defRPr>
     </a:lvl9pPr>
   </p:defaultTextStyle>
+  <p:extLst>
+    <p:ext uri="{EFAFB233-063F-42B5-8137-9DF3F51BA10A}">
+      <p15:sldGuideLst xmlns:p15="http://schemas.microsoft.com/office/powerpoint/2012/main"/>
+    </p:ext>
+  </p:extLst>
 </p:presentation>
 </file>
 
@@ -193,7 +216,7 @@
           <a:p>
             <a:fld id="{F93EA34C-9AFF-2249-84E1-B124EBF18696}" type="datetimeFigureOut">
               <a:rPr lang="en-PT" smtClean="0"/>
-              <a:t>05/06/2025</a:t>
+              <a:t>07/06/2025</a:t>
             </a:fld>
             <a:endParaRPr lang="en-PT"/>
           </a:p>
@@ -616,7 +639,7 @@
           <a:p>
             <a:fld id="{6B91789D-7397-0746-936F-FCB6CAF06201}" type="datetime1">
               <a:rPr lang="en-US" smtClean="0"/>
-              <a:t>6/5/25</a:t>
+              <a:t>6/7/25</a:t>
             </a:fld>
             <a:endParaRPr lang="en-US" dirty="0"/>
           </a:p>
@@ -787,7 +810,7 @@
           <a:p>
             <a:fld id="{DC71B379-C2BC-FC44-96DD-FCABC7F3A568}" type="datetime1">
               <a:rPr lang="en-US" smtClean="0"/>
-              <a:t>6/5/25</a:t>
+              <a:t>6/7/25</a:t>
             </a:fld>
             <a:endParaRPr lang="en-US" dirty="0"/>
           </a:p>
@@ -967,7 +990,7 @@
           <a:p>
             <a:fld id="{686F1242-A42E-D349-AEE9-A0D9932A8217}" type="datetime1">
               <a:rPr lang="en-US" smtClean="0"/>
-              <a:t>6/5/25</a:t>
+              <a:t>6/7/25</a:t>
             </a:fld>
             <a:endParaRPr lang="en-US" dirty="0"/>
           </a:p>
@@ -1137,7 +1160,7 @@
           <a:p>
             <a:fld id="{86511E54-4010-5F41-84CF-866B4D0376CF}" type="datetime1">
               <a:rPr lang="en-US" smtClean="0"/>
-              <a:t>6/5/25</a:t>
+              <a:t>6/7/25</a:t>
             </a:fld>
             <a:endParaRPr lang="en-US" dirty="0"/>
           </a:p>
@@ -1398,7 +1421,7 @@
           <a:p>
             <a:fld id="{CCBB6AE9-091D-ED42-A71D-D8734B448316}" type="datetime1">
               <a:rPr lang="en-US" smtClean="0"/>
-              <a:t>6/5/25</a:t>
+              <a:t>6/7/25</a:t>
             </a:fld>
             <a:endParaRPr lang="en-US" dirty="0"/>
           </a:p>
@@ -1631,7 +1654,7 @@
           <a:p>
             <a:fld id="{34745AE2-353B-DB4A-8156-9FBD00A5A056}" type="datetime1">
               <a:rPr lang="en-US" smtClean="0"/>
-              <a:t>6/5/25</a:t>
+              <a:t>6/7/25</a:t>
             </a:fld>
             <a:endParaRPr lang="en-US" dirty="0"/>
           </a:p>
@@ -1986,7 +2009,7 @@
           <a:p>
             <a:fld id="{71AD93A5-F0AA-E141-BE1C-D49DBFA49EA8}" type="datetime1">
               <a:rPr lang="en-US" smtClean="0"/>
-              <a:t>6/5/25</a:t>
+              <a:t>6/7/25</a:t>
             </a:fld>
             <a:endParaRPr lang="en-US" dirty="0"/>
           </a:p>
@@ -2127,7 +2150,7 @@
           <a:p>
             <a:fld id="{4834D84E-9AFE-504A-8542-6872970C604D}" type="datetime1">
               <a:rPr lang="en-US" smtClean="0"/>
-              <a:t>6/5/25</a:t>
+              <a:t>6/7/25</a:t>
             </a:fld>
             <a:endParaRPr lang="en-US" dirty="0"/>
           </a:p>
@@ -2222,7 +2245,7 @@
           <a:p>
             <a:fld id="{6A99C2D1-D34F-D146-B405-1241C291F4C3}" type="datetime1">
               <a:rPr lang="en-US" smtClean="0"/>
-              <a:t>6/5/25</a:t>
+              <a:t>6/7/25</a:t>
             </a:fld>
             <a:endParaRPr lang="en-US" dirty="0"/>
           </a:p>
@@ -2579,7 +2602,7 @@
           <a:p>
             <a:fld id="{14E37B4C-699E-0047-A2F3-3BAF77E1D80C}" type="datetime1">
               <a:rPr lang="en-US" smtClean="0"/>
-              <a:t>6/5/25</a:t>
+              <a:t>6/7/25</a:t>
             </a:fld>
             <a:endParaRPr lang="en-US" dirty="0"/>
           </a:p>
@@ -2897,7 +2920,7 @@
           <a:p>
             <a:fld id="{BADFC25F-17A7-FB4A-ACDE-8081FA614CF0}" type="datetime1">
               <a:rPr lang="en-US" smtClean="0"/>
-              <a:t>6/5/25</a:t>
+              <a:t>6/7/25</a:t>
             </a:fld>
             <a:endParaRPr lang="en-US" dirty="0"/>
           </a:p>
@@ -3142,7 +3165,7 @@
           <a:p>
             <a:fld id="{A91B09D2-E2B7-8A49-9CAD-1FE5553BC897}" type="datetime1">
               <a:rPr lang="en-US" smtClean="0"/>
-              <a:t>6/5/25</a:t>
+              <a:t>6/7/25</a:t>
             </a:fld>
             <a:endParaRPr lang="en-US" dirty="0"/>
           </a:p>
@@ -3617,10 +3640,15 @@
         </p:nvSpPr>
         <p:spPr/>
         <p:txBody>
-          <a:bodyPr/>
-          <a:lstStyle/>
-          <a:p>
-            <a:endParaRPr lang="en-PT"/>
+          <a:bodyPr>
+            <a:normAutofit fontScale="90000"/>
+          </a:bodyPr>
+          <a:lstStyle/>
+          <a:p>
+            <a:r>
+              <a:rPr lang="en-PT" dirty="0"/>
+              <a:t>Modelação e Previsão do Consumo Mensal de Eletricidade em Espanha</a:t>
+            </a:r>
           </a:p>
         </p:txBody>
       </p:sp>
@@ -3652,6 +3680,12 @@
             <a:r>
               <a:rPr lang="en-PT" dirty="0"/>
               <a:t>presentacao com max de 10min</a:t>
+            </a:r>
+          </a:p>
+          <a:p>
+            <a:r>
+              <a:rPr lang="en-PT" dirty="0"/>
+              <a:t>+ logo uni + autor</a:t>
             </a:r>
           </a:p>
         </p:txBody>
@@ -3660,6 +3694,1877 @@
     <p:extLst>
       <p:ext uri="{BB962C8B-B14F-4D97-AF65-F5344CB8AC3E}">
         <p14:creationId xmlns:p14="http://schemas.microsoft.com/office/powerpoint/2010/main" val="293016070"/>
+      </p:ext>
+    </p:extLst>
+  </p:cSld>
+  <p:clrMapOvr>
+    <a:masterClrMapping/>
+  </p:clrMapOvr>
+</p:sld>
+</file>
+
+<file path=ppt/slides/slide10.xml><?xml version="1.0" encoding="utf-8"?>
+<p:sld xmlns:a="http://schemas.openxmlformats.org/drawingml/2006/main" xmlns:r="http://schemas.openxmlformats.org/officeDocument/2006/relationships" xmlns:p="http://schemas.openxmlformats.org/presentationml/2006/main">
+  <p:cSld>
+    <p:spTree>
+      <p:nvGrpSpPr>
+        <p:cNvPr id="1" name=""/>
+        <p:cNvGrpSpPr/>
+        <p:nvPr/>
+      </p:nvGrpSpPr>
+      <p:grpSpPr>
+        <a:xfrm>
+          <a:off x="0" y="0"/>
+          <a:ext cx="0" cy="0"/>
+          <a:chOff x="0" y="0"/>
+          <a:chExt cx="0" cy="0"/>
+        </a:xfrm>
+      </p:grpSpPr>
+      <p:sp>
+        <p:nvSpPr>
+          <p:cNvPr id="2" name="Title 1">
+            <a:extLst>
+              <a:ext uri="{FF2B5EF4-FFF2-40B4-BE49-F238E27FC236}">
+                <a16:creationId xmlns:a16="http://schemas.microsoft.com/office/drawing/2014/main" id="{72EE8C77-EC28-7A32-6C82-BB4299D31893}"/>
+              </a:ext>
+            </a:extLst>
+          </p:cNvPr>
+          <p:cNvSpPr>
+            <a:spLocks noGrp="1"/>
+          </p:cNvSpPr>
+          <p:nvPr>
+            <p:ph type="title"/>
+          </p:nvPr>
+        </p:nvSpPr>
+        <p:spPr/>
+        <p:txBody>
+          <a:bodyPr/>
+          <a:lstStyle/>
+          <a:p>
+            <a:r>
+              <a:rPr lang="en-PT" dirty="0"/>
+              <a:t>SARIMA</a:t>
+            </a:r>
+          </a:p>
+        </p:txBody>
+      </p:sp>
+      <p:sp>
+        <p:nvSpPr>
+          <p:cNvPr id="3" name="Content Placeholder 2">
+            <a:extLst>
+              <a:ext uri="{FF2B5EF4-FFF2-40B4-BE49-F238E27FC236}">
+                <a16:creationId xmlns:a16="http://schemas.microsoft.com/office/drawing/2014/main" id="{BB4F842F-4ADE-7B2E-7358-43E0AAD4FB66}"/>
+              </a:ext>
+            </a:extLst>
+          </p:cNvPr>
+          <p:cNvSpPr>
+            <a:spLocks noGrp="1"/>
+          </p:cNvSpPr>
+          <p:nvPr>
+            <p:ph idx="1"/>
+          </p:nvPr>
+        </p:nvSpPr>
+        <p:spPr>
+          <a:xfrm>
+            <a:off x="2231136" y="6332694"/>
+            <a:ext cx="7729728" cy="501971"/>
+          </a:xfrm>
+        </p:spPr>
+        <p:txBody>
+          <a:bodyPr/>
+          <a:lstStyle/>
+          <a:p>
+            <a:r>
+              <a:rPr lang="en-GB" dirty="0"/>
+              <a:t>A</a:t>
+            </a:r>
+            <a:r>
+              <a:rPr lang="en-PT" dirty="0"/>
+              <a:t>dicionar prints ljubox test: todos apresentam correlação nos residuos</a:t>
+            </a:r>
+          </a:p>
+        </p:txBody>
+      </p:sp>
+      <p:sp>
+        <p:nvSpPr>
+          <p:cNvPr id="4" name="Slide Number Placeholder 3">
+            <a:extLst>
+              <a:ext uri="{FF2B5EF4-FFF2-40B4-BE49-F238E27FC236}">
+                <a16:creationId xmlns:a16="http://schemas.microsoft.com/office/drawing/2014/main" id="{41569205-FC3B-E20F-1E1A-83EDF9E4BEB3}"/>
+              </a:ext>
+            </a:extLst>
+          </p:cNvPr>
+          <p:cNvSpPr>
+            <a:spLocks noGrp="1"/>
+          </p:cNvSpPr>
+          <p:nvPr>
+            <p:ph type="sldNum" sz="quarter" idx="12"/>
+          </p:nvPr>
+        </p:nvSpPr>
+        <p:spPr/>
+        <p:txBody>
+          <a:bodyPr/>
+          <a:lstStyle/>
+          <a:p>
+            <a:fld id="{8A7A6979-0714-4377-B894-6BE4C2D6E202}" type="slidenum">
+              <a:rPr lang="en-US" smtClean="0"/>
+              <a:pPr/>
+              <a:t>10</a:t>
+            </a:fld>
+            <a:endParaRPr lang="en-US" dirty="0"/>
+          </a:p>
+        </p:txBody>
+      </p:sp>
+      <p:pic>
+        <p:nvPicPr>
+          <p:cNvPr id="5" name="Picture 4">
+            <a:extLst>
+              <a:ext uri="{FF2B5EF4-FFF2-40B4-BE49-F238E27FC236}">
+                <a16:creationId xmlns:a16="http://schemas.microsoft.com/office/drawing/2014/main" id="{F56B4D99-8CA3-089E-8CC9-68B962309B78}"/>
+              </a:ext>
+            </a:extLst>
+          </p:cNvPr>
+          <p:cNvPicPr>
+            <a:picLocks noChangeAspect="1"/>
+          </p:cNvPicPr>
+          <p:nvPr/>
+        </p:nvPicPr>
+        <p:blipFill>
+          <a:blip r:embed="rId2"/>
+          <a:stretch>
+            <a:fillRect/>
+          </a:stretch>
+        </p:blipFill>
+        <p:spPr>
+          <a:xfrm>
+            <a:off x="8075442" y="2642379"/>
+            <a:ext cx="3618971" cy="3101975"/>
+          </a:xfrm>
+          <a:prstGeom prst="rect">
+            <a:avLst/>
+          </a:prstGeom>
+        </p:spPr>
+      </p:pic>
+      <p:pic>
+        <p:nvPicPr>
+          <p:cNvPr id="6" name="Picture 5">
+            <a:extLst>
+              <a:ext uri="{FF2B5EF4-FFF2-40B4-BE49-F238E27FC236}">
+                <a16:creationId xmlns:a16="http://schemas.microsoft.com/office/drawing/2014/main" id="{BF0B3ED9-137D-E3DA-0B71-A42C2D36AE1D}"/>
+              </a:ext>
+            </a:extLst>
+          </p:cNvPr>
+          <p:cNvPicPr>
+            <a:picLocks noChangeAspect="1"/>
+          </p:cNvPicPr>
+          <p:nvPr/>
+        </p:nvPicPr>
+        <p:blipFill>
+          <a:blip r:embed="rId3"/>
+          <a:stretch>
+            <a:fillRect/>
+          </a:stretch>
+        </p:blipFill>
+        <p:spPr>
+          <a:xfrm>
+            <a:off x="4286514" y="2642379"/>
+            <a:ext cx="3618971" cy="3101976"/>
+          </a:xfrm>
+          <a:prstGeom prst="rect">
+            <a:avLst/>
+          </a:prstGeom>
+        </p:spPr>
+      </p:pic>
+      <p:pic>
+        <p:nvPicPr>
+          <p:cNvPr id="7" name="Content Placeholder 5">
+            <a:extLst>
+              <a:ext uri="{FF2B5EF4-FFF2-40B4-BE49-F238E27FC236}">
+                <a16:creationId xmlns:a16="http://schemas.microsoft.com/office/drawing/2014/main" id="{EEE7A942-51F5-0A34-1CF1-A48F0A116300}"/>
+              </a:ext>
+            </a:extLst>
+          </p:cNvPr>
+          <p:cNvPicPr>
+            <a:picLocks noChangeAspect="1"/>
+          </p:cNvPicPr>
+          <p:nvPr/>
+        </p:nvPicPr>
+        <p:blipFill>
+          <a:blip r:embed="rId4"/>
+          <a:stretch>
+            <a:fillRect/>
+          </a:stretch>
+        </p:blipFill>
+        <p:spPr>
+          <a:xfrm>
+            <a:off x="497587" y="2642379"/>
+            <a:ext cx="3618970" cy="3101975"/>
+          </a:xfrm>
+          <a:prstGeom prst="rect">
+            <a:avLst/>
+          </a:prstGeom>
+        </p:spPr>
+      </p:pic>
+    </p:spTree>
+    <p:extLst>
+      <p:ext uri="{BB962C8B-B14F-4D97-AF65-F5344CB8AC3E}">
+        <p14:creationId xmlns:p14="http://schemas.microsoft.com/office/powerpoint/2010/main" val="1386755028"/>
+      </p:ext>
+    </p:extLst>
+  </p:cSld>
+  <p:clrMapOvr>
+    <a:masterClrMapping/>
+  </p:clrMapOvr>
+</p:sld>
+</file>
+
+<file path=ppt/slides/slide11.xml><?xml version="1.0" encoding="utf-8"?>
+<p:sld xmlns:a="http://schemas.openxmlformats.org/drawingml/2006/main" xmlns:r="http://schemas.openxmlformats.org/officeDocument/2006/relationships" xmlns:p="http://schemas.openxmlformats.org/presentationml/2006/main">
+  <p:cSld>
+    <p:spTree>
+      <p:nvGrpSpPr>
+        <p:cNvPr id="1" name=""/>
+        <p:cNvGrpSpPr/>
+        <p:nvPr/>
+      </p:nvGrpSpPr>
+      <p:grpSpPr>
+        <a:xfrm>
+          <a:off x="0" y="0"/>
+          <a:ext cx="0" cy="0"/>
+          <a:chOff x="0" y="0"/>
+          <a:chExt cx="0" cy="0"/>
+        </a:xfrm>
+      </p:grpSpPr>
+      <p:sp>
+        <p:nvSpPr>
+          <p:cNvPr id="2" name="Title 1">
+            <a:extLst>
+              <a:ext uri="{FF2B5EF4-FFF2-40B4-BE49-F238E27FC236}">
+                <a16:creationId xmlns:a16="http://schemas.microsoft.com/office/drawing/2014/main" id="{336DE73E-2930-14C2-F7C0-A12BD90B6BB5}"/>
+              </a:ext>
+            </a:extLst>
+          </p:cNvPr>
+          <p:cNvSpPr>
+            <a:spLocks noGrp="1"/>
+          </p:cNvSpPr>
+          <p:nvPr>
+            <p:ph type="title"/>
+          </p:nvPr>
+        </p:nvSpPr>
+        <p:spPr/>
+        <p:txBody>
+          <a:bodyPr/>
+          <a:lstStyle/>
+          <a:p>
+            <a:r>
+              <a:rPr lang="en-PT" dirty="0"/>
+              <a:t>SARIMA</a:t>
+            </a:r>
+          </a:p>
+        </p:txBody>
+      </p:sp>
+      <p:sp>
+        <p:nvSpPr>
+          <p:cNvPr id="3" name="Content Placeholder 2">
+            <a:extLst>
+              <a:ext uri="{FF2B5EF4-FFF2-40B4-BE49-F238E27FC236}">
+                <a16:creationId xmlns:a16="http://schemas.microsoft.com/office/drawing/2014/main" id="{E2505070-52A0-3C34-E27C-64FD96B728F9}"/>
+              </a:ext>
+            </a:extLst>
+          </p:cNvPr>
+          <p:cNvSpPr>
+            <a:spLocks noGrp="1"/>
+          </p:cNvSpPr>
+          <p:nvPr>
+            <p:ph idx="1"/>
+          </p:nvPr>
+        </p:nvSpPr>
+        <p:spPr>
+          <a:xfrm>
+            <a:off x="1067318" y="5893308"/>
+            <a:ext cx="7729728" cy="536477"/>
+          </a:xfrm>
+        </p:spPr>
+        <p:txBody>
+          <a:bodyPr/>
+          <a:lstStyle/>
+          <a:p>
+            <a:r>
+              <a:rPr lang="en-GB" dirty="0"/>
+              <a:t>A</a:t>
+            </a:r>
+            <a:r>
+              <a:rPr lang="en-PT" dirty="0"/>
+              <a:t>dicionar ljunbox test + testes da normalidade</a:t>
+            </a:r>
+          </a:p>
+        </p:txBody>
+      </p:sp>
+      <p:sp>
+        <p:nvSpPr>
+          <p:cNvPr id="4" name="Slide Number Placeholder 3">
+            <a:extLst>
+              <a:ext uri="{FF2B5EF4-FFF2-40B4-BE49-F238E27FC236}">
+                <a16:creationId xmlns:a16="http://schemas.microsoft.com/office/drawing/2014/main" id="{153E033A-F85E-3AB1-7AD1-7A59E0025351}"/>
+              </a:ext>
+            </a:extLst>
+          </p:cNvPr>
+          <p:cNvSpPr>
+            <a:spLocks noGrp="1"/>
+          </p:cNvSpPr>
+          <p:nvPr>
+            <p:ph type="sldNum" sz="quarter" idx="12"/>
+          </p:nvPr>
+        </p:nvSpPr>
+        <p:spPr/>
+        <p:txBody>
+          <a:bodyPr/>
+          <a:lstStyle/>
+          <a:p>
+            <a:fld id="{8A7A6979-0714-4377-B894-6BE4C2D6E202}" type="slidenum">
+              <a:rPr lang="en-US" smtClean="0"/>
+              <a:pPr/>
+              <a:t>11</a:t>
+            </a:fld>
+            <a:endParaRPr lang="en-US" dirty="0"/>
+          </a:p>
+        </p:txBody>
+      </p:sp>
+      <p:pic>
+        <p:nvPicPr>
+          <p:cNvPr id="5" name="Picture 4">
+            <a:extLst>
+              <a:ext uri="{FF2B5EF4-FFF2-40B4-BE49-F238E27FC236}">
+                <a16:creationId xmlns:a16="http://schemas.microsoft.com/office/drawing/2014/main" id="{A298B60D-B511-DDD8-1391-8DACA17C42EB}"/>
+              </a:ext>
+            </a:extLst>
+          </p:cNvPr>
+          <p:cNvPicPr>
+            <a:picLocks noChangeAspect="1"/>
+          </p:cNvPicPr>
+          <p:nvPr/>
+        </p:nvPicPr>
+        <p:blipFill>
+          <a:blip r:embed="rId2"/>
+          <a:stretch>
+            <a:fillRect/>
+          </a:stretch>
+        </p:blipFill>
+        <p:spPr>
+          <a:xfrm>
+            <a:off x="6642339" y="2416960"/>
+            <a:ext cx="5058768" cy="2890724"/>
+          </a:xfrm>
+          <a:prstGeom prst="rect">
+            <a:avLst/>
+          </a:prstGeom>
+        </p:spPr>
+      </p:pic>
+      <p:pic>
+        <p:nvPicPr>
+          <p:cNvPr id="6" name="Content Placeholder 5">
+            <a:extLst>
+              <a:ext uri="{FF2B5EF4-FFF2-40B4-BE49-F238E27FC236}">
+                <a16:creationId xmlns:a16="http://schemas.microsoft.com/office/drawing/2014/main" id="{55A67B1E-D1A3-1F7C-FC25-5E2BAA05F7C5}"/>
+              </a:ext>
+            </a:extLst>
+          </p:cNvPr>
+          <p:cNvPicPr>
+            <a:picLocks noChangeAspect="1"/>
+          </p:cNvPicPr>
+          <p:nvPr/>
+        </p:nvPicPr>
+        <p:blipFill>
+          <a:blip r:embed="rId3"/>
+          <a:stretch>
+            <a:fillRect/>
+          </a:stretch>
+        </p:blipFill>
+        <p:spPr>
+          <a:xfrm>
+            <a:off x="1015559" y="2311334"/>
+            <a:ext cx="3618970" cy="3101975"/>
+          </a:xfrm>
+          <a:prstGeom prst="rect">
+            <a:avLst/>
+          </a:prstGeom>
+        </p:spPr>
+      </p:pic>
+    </p:spTree>
+    <p:extLst>
+      <p:ext uri="{BB962C8B-B14F-4D97-AF65-F5344CB8AC3E}">
+        <p14:creationId xmlns:p14="http://schemas.microsoft.com/office/powerpoint/2010/main" val="3607576276"/>
+      </p:ext>
+    </p:extLst>
+  </p:cSld>
+  <p:clrMapOvr>
+    <a:masterClrMapping/>
+  </p:clrMapOvr>
+</p:sld>
+</file>
+
+<file path=ppt/slides/slide12.xml><?xml version="1.0" encoding="utf-8"?>
+<p:sld xmlns:a="http://schemas.openxmlformats.org/drawingml/2006/main" xmlns:r="http://schemas.openxmlformats.org/officeDocument/2006/relationships" xmlns:p="http://schemas.openxmlformats.org/presentationml/2006/main">
+  <p:cSld>
+    <p:spTree>
+      <p:nvGrpSpPr>
+        <p:cNvPr id="1" name=""/>
+        <p:cNvGrpSpPr/>
+        <p:nvPr/>
+      </p:nvGrpSpPr>
+      <p:grpSpPr>
+        <a:xfrm>
+          <a:off x="0" y="0"/>
+          <a:ext cx="0" cy="0"/>
+          <a:chOff x="0" y="0"/>
+          <a:chExt cx="0" cy="0"/>
+        </a:xfrm>
+      </p:grpSpPr>
+      <p:sp>
+        <p:nvSpPr>
+          <p:cNvPr id="2" name="Title 1">
+            <a:extLst>
+              <a:ext uri="{FF2B5EF4-FFF2-40B4-BE49-F238E27FC236}">
+                <a16:creationId xmlns:a16="http://schemas.microsoft.com/office/drawing/2014/main" id="{C27B9394-E25A-434B-1ED4-8B1E5300BD65}"/>
+              </a:ext>
+            </a:extLst>
+          </p:cNvPr>
+          <p:cNvSpPr>
+            <a:spLocks noGrp="1"/>
+          </p:cNvSpPr>
+          <p:nvPr>
+            <p:ph type="title"/>
+          </p:nvPr>
+        </p:nvSpPr>
+        <p:spPr/>
+        <p:txBody>
+          <a:bodyPr/>
+          <a:lstStyle/>
+          <a:p>
+            <a:r>
+              <a:rPr lang="en-PT" dirty="0"/>
+              <a:t>garch</a:t>
+            </a:r>
+          </a:p>
+        </p:txBody>
+      </p:sp>
+      <p:sp>
+        <p:nvSpPr>
+          <p:cNvPr id="3" name="Content Placeholder 2">
+            <a:extLst>
+              <a:ext uri="{FF2B5EF4-FFF2-40B4-BE49-F238E27FC236}">
+                <a16:creationId xmlns:a16="http://schemas.microsoft.com/office/drawing/2014/main" id="{194EC6C3-D577-5969-AB40-78BE17054996}"/>
+              </a:ext>
+            </a:extLst>
+          </p:cNvPr>
+          <p:cNvSpPr>
+            <a:spLocks noGrp="1"/>
+          </p:cNvSpPr>
+          <p:nvPr>
+            <p:ph idx="1"/>
+          </p:nvPr>
+        </p:nvSpPr>
+        <p:spPr/>
+        <p:txBody>
+          <a:bodyPr/>
+          <a:lstStyle/>
+          <a:p>
+            <a:r>
+              <a:rPr lang="en-GB" dirty="0"/>
+              <a:t>M</a:t>
+            </a:r>
+            <a:r>
+              <a:rPr lang="en-PT" dirty="0"/>
+              <a:t>eter print do teste</a:t>
+            </a:r>
+          </a:p>
+        </p:txBody>
+      </p:sp>
+      <p:sp>
+        <p:nvSpPr>
+          <p:cNvPr id="4" name="Slide Number Placeholder 3">
+            <a:extLst>
+              <a:ext uri="{FF2B5EF4-FFF2-40B4-BE49-F238E27FC236}">
+                <a16:creationId xmlns:a16="http://schemas.microsoft.com/office/drawing/2014/main" id="{DC4D62B4-F2AE-EDF1-963C-9A95B9BC0324}"/>
+              </a:ext>
+            </a:extLst>
+          </p:cNvPr>
+          <p:cNvSpPr>
+            <a:spLocks noGrp="1"/>
+          </p:cNvSpPr>
+          <p:nvPr>
+            <p:ph type="sldNum" sz="quarter" idx="12"/>
+          </p:nvPr>
+        </p:nvSpPr>
+        <p:spPr/>
+        <p:txBody>
+          <a:bodyPr/>
+          <a:lstStyle/>
+          <a:p>
+            <a:fld id="{8A7A6979-0714-4377-B894-6BE4C2D6E202}" type="slidenum">
+              <a:rPr lang="en-US" smtClean="0"/>
+              <a:pPr/>
+              <a:t>12</a:t>
+            </a:fld>
+            <a:endParaRPr lang="en-US" dirty="0"/>
+          </a:p>
+        </p:txBody>
+      </p:sp>
+    </p:spTree>
+    <p:extLst>
+      <p:ext uri="{BB962C8B-B14F-4D97-AF65-F5344CB8AC3E}">
+        <p14:creationId xmlns:p14="http://schemas.microsoft.com/office/powerpoint/2010/main" val="905151496"/>
+      </p:ext>
+    </p:extLst>
+  </p:cSld>
+  <p:clrMapOvr>
+    <a:masterClrMapping/>
+  </p:clrMapOvr>
+</p:sld>
+</file>
+
+<file path=ppt/slides/slide13.xml><?xml version="1.0" encoding="utf-8"?>
+<p:sld xmlns:a="http://schemas.openxmlformats.org/drawingml/2006/main" xmlns:r="http://schemas.openxmlformats.org/officeDocument/2006/relationships" xmlns:p="http://schemas.openxmlformats.org/presentationml/2006/main">
+  <p:cSld>
+    <p:spTree>
+      <p:nvGrpSpPr>
+        <p:cNvPr id="1" name=""/>
+        <p:cNvGrpSpPr/>
+        <p:nvPr/>
+      </p:nvGrpSpPr>
+      <p:grpSpPr>
+        <a:xfrm>
+          <a:off x="0" y="0"/>
+          <a:ext cx="0" cy="0"/>
+          <a:chOff x="0" y="0"/>
+          <a:chExt cx="0" cy="0"/>
+        </a:xfrm>
+      </p:grpSpPr>
+      <p:sp>
+        <p:nvSpPr>
+          <p:cNvPr id="2" name="Title 1">
+            <a:extLst>
+              <a:ext uri="{FF2B5EF4-FFF2-40B4-BE49-F238E27FC236}">
+                <a16:creationId xmlns:a16="http://schemas.microsoft.com/office/drawing/2014/main" id="{F1221054-B791-0E8D-F4A2-9449DA0A19C1}"/>
+              </a:ext>
+            </a:extLst>
+          </p:cNvPr>
+          <p:cNvSpPr>
+            <a:spLocks noGrp="1"/>
+          </p:cNvSpPr>
+          <p:nvPr>
+            <p:ph type="title"/>
+          </p:nvPr>
+        </p:nvSpPr>
+        <p:spPr/>
+        <p:txBody>
+          <a:bodyPr/>
+          <a:lstStyle/>
+          <a:p>
+            <a:r>
+              <a:rPr lang="en-PT" dirty="0"/>
+              <a:t>ETS</a:t>
+            </a:r>
+          </a:p>
+        </p:txBody>
+      </p:sp>
+      <p:sp>
+        <p:nvSpPr>
+          <p:cNvPr id="3" name="Content Placeholder 2">
+            <a:extLst>
+              <a:ext uri="{FF2B5EF4-FFF2-40B4-BE49-F238E27FC236}">
+                <a16:creationId xmlns:a16="http://schemas.microsoft.com/office/drawing/2014/main" id="{B8135646-F64C-C63B-6E0A-CEB796D02F5D}"/>
+              </a:ext>
+            </a:extLst>
+          </p:cNvPr>
+          <p:cNvSpPr>
+            <a:spLocks noGrp="1"/>
+          </p:cNvSpPr>
+          <p:nvPr>
+            <p:ph idx="1"/>
+          </p:nvPr>
+        </p:nvSpPr>
+        <p:spPr/>
+        <p:txBody>
+          <a:bodyPr/>
+          <a:lstStyle/>
+          <a:p>
+            <a:r>
+              <a:rPr lang="en-PT" dirty="0"/>
+              <a:t>Modelo ajustado tendo em conta o critério AICc: ETS(M,N,A)</a:t>
+            </a:r>
+          </a:p>
+        </p:txBody>
+      </p:sp>
+      <p:sp>
+        <p:nvSpPr>
+          <p:cNvPr id="4" name="Slide Number Placeholder 3">
+            <a:extLst>
+              <a:ext uri="{FF2B5EF4-FFF2-40B4-BE49-F238E27FC236}">
+                <a16:creationId xmlns:a16="http://schemas.microsoft.com/office/drawing/2014/main" id="{19461F28-46B0-7A0C-1133-C20531347032}"/>
+              </a:ext>
+            </a:extLst>
+          </p:cNvPr>
+          <p:cNvSpPr>
+            <a:spLocks noGrp="1"/>
+          </p:cNvSpPr>
+          <p:nvPr>
+            <p:ph type="sldNum" sz="quarter" idx="12"/>
+          </p:nvPr>
+        </p:nvSpPr>
+        <p:spPr/>
+        <p:txBody>
+          <a:bodyPr/>
+          <a:lstStyle/>
+          <a:p>
+            <a:fld id="{8A7A6979-0714-4377-B894-6BE4C2D6E202}" type="slidenum">
+              <a:rPr lang="en-US" smtClean="0"/>
+              <a:pPr/>
+              <a:t>13</a:t>
+            </a:fld>
+            <a:endParaRPr lang="en-US" dirty="0"/>
+          </a:p>
+        </p:txBody>
+      </p:sp>
+      <p:pic>
+        <p:nvPicPr>
+          <p:cNvPr id="5" name="Content Placeholder 5">
+            <a:extLst>
+              <a:ext uri="{FF2B5EF4-FFF2-40B4-BE49-F238E27FC236}">
+                <a16:creationId xmlns:a16="http://schemas.microsoft.com/office/drawing/2014/main" id="{DCFDF486-7111-BCD9-A357-49C1B9BAF5CA}"/>
+              </a:ext>
+            </a:extLst>
+          </p:cNvPr>
+          <p:cNvPicPr>
+            <a:picLocks noChangeAspect="1"/>
+          </p:cNvPicPr>
+          <p:nvPr/>
+        </p:nvPicPr>
+        <p:blipFill>
+          <a:blip r:embed="rId2"/>
+          <a:stretch>
+            <a:fillRect/>
+          </a:stretch>
+        </p:blipFill>
+        <p:spPr>
+          <a:xfrm>
+            <a:off x="1922877" y="3429000"/>
+            <a:ext cx="3618970" cy="3101975"/>
+          </a:xfrm>
+          <a:prstGeom prst="rect">
+            <a:avLst/>
+          </a:prstGeom>
+        </p:spPr>
+      </p:pic>
+      <p:sp>
+        <p:nvSpPr>
+          <p:cNvPr id="6" name="Content Placeholder 2">
+            <a:extLst>
+              <a:ext uri="{FF2B5EF4-FFF2-40B4-BE49-F238E27FC236}">
+                <a16:creationId xmlns:a16="http://schemas.microsoft.com/office/drawing/2014/main" id="{920AD1D4-D8B9-A2F7-ED5F-98CE1C320566}"/>
+              </a:ext>
+            </a:extLst>
+          </p:cNvPr>
+          <p:cNvSpPr txBox="1">
+            <a:spLocks/>
+          </p:cNvSpPr>
+          <p:nvPr/>
+        </p:nvSpPr>
+        <p:spPr>
+          <a:xfrm>
+            <a:off x="6096000" y="4168112"/>
+            <a:ext cx="3864864" cy="536477"/>
+          </a:xfrm>
+          <a:prstGeom prst="rect">
+            <a:avLst/>
+          </a:prstGeom>
+        </p:spPr>
+        <p:txBody>
+          <a:bodyPr vert="horz" lIns="91440" tIns="45720" rIns="91440" bIns="45720" rtlCol="0">
+            <a:normAutofit/>
+          </a:bodyPr>
+          <a:lstStyle>
+            <a:lvl1pPr marL="228600" indent="-228600" algn="l" defTabSz="914400" rtl="0" eaLnBrk="1" latinLnBrk="0" hangingPunct="1">
+              <a:lnSpc>
+                <a:spcPct val="100000"/>
+              </a:lnSpc>
+              <a:spcBef>
+                <a:spcPts val="1000"/>
+              </a:spcBef>
+              <a:buClr>
+                <a:schemeClr val="accent2"/>
+              </a:buClr>
+              <a:buFont typeface="Arial" panose="020B0604020202020204" pitchFamily="34" charset="0"/>
+              <a:buChar char="•"/>
+              <a:defRPr sz="1800" kern="1200">
+                <a:solidFill>
+                  <a:schemeClr val="tx1">
+                    <a:lumMod val="85000"/>
+                    <a:lumOff val="15000"/>
+                  </a:schemeClr>
+                </a:solidFill>
+                <a:latin typeface="+mn-lt"/>
+                <a:ea typeface="+mn-ea"/>
+                <a:cs typeface="+mn-cs"/>
+              </a:defRPr>
+            </a:lvl1pPr>
+            <a:lvl2pPr marL="457200" indent="-228600" algn="l" defTabSz="914400" rtl="0" eaLnBrk="1" latinLnBrk="0" hangingPunct="1">
+              <a:lnSpc>
+                <a:spcPct val="100000"/>
+              </a:lnSpc>
+              <a:spcBef>
+                <a:spcPts val="1000"/>
+              </a:spcBef>
+              <a:buClr>
+                <a:schemeClr val="accent2"/>
+              </a:buClr>
+              <a:buFont typeface="Arial" panose="020B0604020202020204" pitchFamily="34" charset="0"/>
+              <a:buChar char="•"/>
+              <a:defRPr sz="1600" kern="1200">
+                <a:solidFill>
+                  <a:schemeClr val="tx1">
+                    <a:lumMod val="85000"/>
+                    <a:lumOff val="15000"/>
+                  </a:schemeClr>
+                </a:solidFill>
+                <a:latin typeface="+mn-lt"/>
+                <a:ea typeface="+mn-ea"/>
+                <a:cs typeface="+mn-cs"/>
+              </a:defRPr>
+            </a:lvl2pPr>
+            <a:lvl3pPr marL="685800" indent="-228600" algn="l" defTabSz="914400" rtl="0" eaLnBrk="1" latinLnBrk="0" hangingPunct="1">
+              <a:lnSpc>
+                <a:spcPct val="100000"/>
+              </a:lnSpc>
+              <a:spcBef>
+                <a:spcPts val="1000"/>
+              </a:spcBef>
+              <a:buClr>
+                <a:schemeClr val="accent2"/>
+              </a:buClr>
+              <a:buFont typeface="Arial" panose="020B0604020202020204" pitchFamily="34" charset="0"/>
+              <a:buChar char="•"/>
+              <a:defRPr sz="1600" kern="1200">
+                <a:solidFill>
+                  <a:schemeClr val="tx1">
+                    <a:lumMod val="85000"/>
+                    <a:lumOff val="15000"/>
+                  </a:schemeClr>
+                </a:solidFill>
+                <a:latin typeface="+mn-lt"/>
+                <a:ea typeface="+mn-ea"/>
+                <a:cs typeface="+mn-cs"/>
+              </a:defRPr>
+            </a:lvl3pPr>
+            <a:lvl4pPr marL="914400" indent="-228600" algn="l" defTabSz="914400" rtl="0" eaLnBrk="1" latinLnBrk="0" hangingPunct="1">
+              <a:lnSpc>
+                <a:spcPct val="100000"/>
+              </a:lnSpc>
+              <a:spcBef>
+                <a:spcPts val="1000"/>
+              </a:spcBef>
+              <a:buClr>
+                <a:schemeClr val="accent2"/>
+              </a:buClr>
+              <a:buFont typeface="Arial" panose="020B0604020202020204" pitchFamily="34" charset="0"/>
+              <a:buChar char="•"/>
+              <a:defRPr sz="1600" kern="1200">
+                <a:solidFill>
+                  <a:schemeClr val="tx1">
+                    <a:lumMod val="85000"/>
+                    <a:lumOff val="15000"/>
+                  </a:schemeClr>
+                </a:solidFill>
+                <a:latin typeface="+mn-lt"/>
+                <a:ea typeface="+mn-ea"/>
+                <a:cs typeface="+mn-cs"/>
+              </a:defRPr>
+            </a:lvl4pPr>
+            <a:lvl5pPr marL="1143000" indent="-228600" algn="l" defTabSz="914400" rtl="0" eaLnBrk="1" latinLnBrk="0" hangingPunct="1">
+              <a:lnSpc>
+                <a:spcPct val="100000"/>
+              </a:lnSpc>
+              <a:spcBef>
+                <a:spcPts val="1000"/>
+              </a:spcBef>
+              <a:buClr>
+                <a:schemeClr val="accent2"/>
+              </a:buClr>
+              <a:buFont typeface="Arial" panose="020B0604020202020204" pitchFamily="34" charset="0"/>
+              <a:buChar char="•"/>
+              <a:defRPr sz="1600" kern="1200">
+                <a:solidFill>
+                  <a:schemeClr val="tx1">
+                    <a:lumMod val="85000"/>
+                    <a:lumOff val="15000"/>
+                  </a:schemeClr>
+                </a:solidFill>
+                <a:latin typeface="+mn-lt"/>
+                <a:ea typeface="+mn-ea"/>
+                <a:cs typeface="+mn-cs"/>
+              </a:defRPr>
+            </a:lvl5pPr>
+            <a:lvl6pPr marL="1312863" indent="-228600" algn="l" defTabSz="914400" rtl="0" eaLnBrk="1" latinLnBrk="0" hangingPunct="1">
+              <a:lnSpc>
+                <a:spcPct val="100000"/>
+              </a:lnSpc>
+              <a:spcBef>
+                <a:spcPts val="1000"/>
+              </a:spcBef>
+              <a:buClr>
+                <a:schemeClr val="accent2"/>
+              </a:buClr>
+              <a:buFont typeface="Arial" panose="020B0604020202020204" pitchFamily="34" charset="0"/>
+              <a:buChar char="•"/>
+              <a:defRPr sz="1600" kern="1200">
+                <a:solidFill>
+                  <a:schemeClr val="tx1"/>
+                </a:solidFill>
+                <a:latin typeface="+mn-lt"/>
+                <a:ea typeface="+mn-ea"/>
+                <a:cs typeface="+mn-cs"/>
+              </a:defRPr>
+            </a:lvl6pPr>
+            <a:lvl7pPr marL="1484313" indent="-228600" algn="l" defTabSz="914400" rtl="0" eaLnBrk="1" latinLnBrk="0" hangingPunct="1">
+              <a:lnSpc>
+                <a:spcPct val="100000"/>
+              </a:lnSpc>
+              <a:spcBef>
+                <a:spcPts val="1000"/>
+              </a:spcBef>
+              <a:buClr>
+                <a:schemeClr val="accent2"/>
+              </a:buClr>
+              <a:buFont typeface="Arial" panose="020B0604020202020204" pitchFamily="34" charset="0"/>
+              <a:buChar char="•"/>
+              <a:defRPr sz="1600" kern="1200">
+                <a:solidFill>
+                  <a:schemeClr val="tx1"/>
+                </a:solidFill>
+                <a:latin typeface="+mn-lt"/>
+                <a:ea typeface="+mn-ea"/>
+                <a:cs typeface="+mn-cs"/>
+              </a:defRPr>
+            </a:lvl7pPr>
+            <a:lvl8pPr marL="1657350" indent="-228600" algn="l" defTabSz="914400" rtl="0" eaLnBrk="1" latinLnBrk="0" hangingPunct="1">
+              <a:lnSpc>
+                <a:spcPct val="100000"/>
+              </a:lnSpc>
+              <a:spcBef>
+                <a:spcPts val="1000"/>
+              </a:spcBef>
+              <a:buClr>
+                <a:schemeClr val="accent2"/>
+              </a:buClr>
+              <a:buFont typeface="Arial" panose="020B0604020202020204" pitchFamily="34" charset="0"/>
+              <a:buChar char="•"/>
+              <a:defRPr sz="1600" kern="1200" baseline="0">
+                <a:solidFill>
+                  <a:schemeClr val="tx1"/>
+                </a:solidFill>
+                <a:latin typeface="+mn-lt"/>
+                <a:ea typeface="+mn-ea"/>
+                <a:cs typeface="+mn-cs"/>
+              </a:defRPr>
+            </a:lvl8pPr>
+            <a:lvl9pPr marL="1882775" indent="-228600" algn="l" defTabSz="914400" rtl="0" eaLnBrk="1" latinLnBrk="0" hangingPunct="1">
+              <a:lnSpc>
+                <a:spcPct val="100000"/>
+              </a:lnSpc>
+              <a:spcBef>
+                <a:spcPts val="1000"/>
+              </a:spcBef>
+              <a:buClr>
+                <a:schemeClr val="accent2"/>
+              </a:buClr>
+              <a:buFont typeface="Arial" panose="020B0604020202020204" pitchFamily="34" charset="0"/>
+              <a:buChar char="•"/>
+              <a:defRPr sz="1600" kern="1200" baseline="0">
+                <a:solidFill>
+                  <a:schemeClr val="tx1"/>
+                </a:solidFill>
+                <a:latin typeface="+mn-lt"/>
+                <a:ea typeface="+mn-ea"/>
+                <a:cs typeface="+mn-cs"/>
+              </a:defRPr>
+            </a:lvl9pPr>
+          </a:lstStyle>
+          <a:p>
+            <a:r>
+              <a:rPr lang="en-GB" dirty="0"/>
+              <a:t>A</a:t>
+            </a:r>
+            <a:r>
+              <a:rPr lang="en-PT" dirty="0"/>
+              <a:t>dicionar ljunbox test</a:t>
+            </a:r>
+          </a:p>
+        </p:txBody>
+      </p:sp>
+    </p:spTree>
+    <p:extLst>
+      <p:ext uri="{BB962C8B-B14F-4D97-AF65-F5344CB8AC3E}">
+        <p14:creationId xmlns:p14="http://schemas.microsoft.com/office/powerpoint/2010/main" val="1478907676"/>
+      </p:ext>
+    </p:extLst>
+  </p:cSld>
+  <p:clrMapOvr>
+    <a:masterClrMapping/>
+  </p:clrMapOvr>
+</p:sld>
+</file>
+
+<file path=ppt/slides/slide14.xml><?xml version="1.0" encoding="utf-8"?>
+<p:sld xmlns:a="http://schemas.openxmlformats.org/drawingml/2006/main" xmlns:r="http://schemas.openxmlformats.org/officeDocument/2006/relationships" xmlns:p="http://schemas.openxmlformats.org/presentationml/2006/main">
+  <p:cSld>
+    <p:spTree>
+      <p:nvGrpSpPr>
+        <p:cNvPr id="1" name=""/>
+        <p:cNvGrpSpPr/>
+        <p:nvPr/>
+      </p:nvGrpSpPr>
+      <p:grpSpPr>
+        <a:xfrm>
+          <a:off x="0" y="0"/>
+          <a:ext cx="0" cy="0"/>
+          <a:chOff x="0" y="0"/>
+          <a:chExt cx="0" cy="0"/>
+        </a:xfrm>
+      </p:grpSpPr>
+      <p:sp>
+        <p:nvSpPr>
+          <p:cNvPr id="2" name="Title 1">
+            <a:extLst>
+              <a:ext uri="{FF2B5EF4-FFF2-40B4-BE49-F238E27FC236}">
+                <a16:creationId xmlns:a16="http://schemas.microsoft.com/office/drawing/2014/main" id="{A85328C5-0AD1-A216-3125-4D013EC7FCFB}"/>
+              </a:ext>
+            </a:extLst>
+          </p:cNvPr>
+          <p:cNvSpPr>
+            <a:spLocks noGrp="1"/>
+          </p:cNvSpPr>
+          <p:nvPr>
+            <p:ph type="title"/>
+          </p:nvPr>
+        </p:nvSpPr>
+        <p:spPr/>
+        <p:txBody>
+          <a:bodyPr/>
+          <a:lstStyle/>
+          <a:p>
+            <a:r>
+              <a:rPr lang="en-PT" dirty="0"/>
+              <a:t>STLM</a:t>
+            </a:r>
+          </a:p>
+        </p:txBody>
+      </p:sp>
+      <p:sp>
+        <p:nvSpPr>
+          <p:cNvPr id="3" name="Content Placeholder 2">
+            <a:extLst>
+              <a:ext uri="{FF2B5EF4-FFF2-40B4-BE49-F238E27FC236}">
+                <a16:creationId xmlns:a16="http://schemas.microsoft.com/office/drawing/2014/main" id="{9FF4EE7D-C711-8EE4-3BC4-CFDCE6EC3401}"/>
+              </a:ext>
+            </a:extLst>
+          </p:cNvPr>
+          <p:cNvSpPr>
+            <a:spLocks noGrp="1"/>
+          </p:cNvSpPr>
+          <p:nvPr>
+            <p:ph idx="1"/>
+          </p:nvPr>
+        </p:nvSpPr>
+        <p:spPr/>
+        <p:txBody>
+          <a:bodyPr/>
+          <a:lstStyle/>
+          <a:p>
+            <a:r>
+              <a:rPr lang="en-PT" dirty="0"/>
+              <a:t>STLM(ARIMA)</a:t>
+            </a:r>
+          </a:p>
+        </p:txBody>
+      </p:sp>
+      <p:sp>
+        <p:nvSpPr>
+          <p:cNvPr id="4" name="Slide Number Placeholder 3">
+            <a:extLst>
+              <a:ext uri="{FF2B5EF4-FFF2-40B4-BE49-F238E27FC236}">
+                <a16:creationId xmlns:a16="http://schemas.microsoft.com/office/drawing/2014/main" id="{F161092B-BAE7-48F7-5141-2E7863541A25}"/>
+              </a:ext>
+            </a:extLst>
+          </p:cNvPr>
+          <p:cNvSpPr>
+            <a:spLocks noGrp="1"/>
+          </p:cNvSpPr>
+          <p:nvPr>
+            <p:ph type="sldNum" sz="quarter" idx="12"/>
+          </p:nvPr>
+        </p:nvSpPr>
+        <p:spPr/>
+        <p:txBody>
+          <a:bodyPr/>
+          <a:lstStyle/>
+          <a:p>
+            <a:fld id="{8A7A6979-0714-4377-B894-6BE4C2D6E202}" type="slidenum">
+              <a:rPr lang="en-US" smtClean="0"/>
+              <a:pPr/>
+              <a:t>14</a:t>
+            </a:fld>
+            <a:endParaRPr lang="en-US" dirty="0"/>
+          </a:p>
+        </p:txBody>
+      </p:sp>
+      <p:pic>
+        <p:nvPicPr>
+          <p:cNvPr id="6" name="Content Placeholder 5">
+            <a:extLst>
+              <a:ext uri="{FF2B5EF4-FFF2-40B4-BE49-F238E27FC236}">
+                <a16:creationId xmlns:a16="http://schemas.microsoft.com/office/drawing/2014/main" id="{9C26678B-8094-052D-BF72-56A9DA17E9BA}"/>
+              </a:ext>
+            </a:extLst>
+          </p:cNvPr>
+          <p:cNvPicPr>
+            <a:picLocks noChangeAspect="1"/>
+          </p:cNvPicPr>
+          <p:nvPr/>
+        </p:nvPicPr>
+        <p:blipFill>
+          <a:blip r:embed="rId2"/>
+          <a:stretch>
+            <a:fillRect/>
+          </a:stretch>
+        </p:blipFill>
+        <p:spPr>
+          <a:xfrm>
+            <a:off x="4959376" y="2370333"/>
+            <a:ext cx="4702210" cy="4030467"/>
+          </a:xfrm>
+          <a:prstGeom prst="rect">
+            <a:avLst/>
+          </a:prstGeom>
+        </p:spPr>
+      </p:pic>
+    </p:spTree>
+    <p:extLst>
+      <p:ext uri="{BB962C8B-B14F-4D97-AF65-F5344CB8AC3E}">
+        <p14:creationId xmlns:p14="http://schemas.microsoft.com/office/powerpoint/2010/main" val="483356577"/>
+      </p:ext>
+    </p:extLst>
+  </p:cSld>
+  <p:clrMapOvr>
+    <a:masterClrMapping/>
+  </p:clrMapOvr>
+</p:sld>
+</file>
+
+<file path=ppt/slides/slide15.xml><?xml version="1.0" encoding="utf-8"?>
+<p:sld xmlns:a="http://schemas.openxmlformats.org/drawingml/2006/main" xmlns:r="http://schemas.openxmlformats.org/officeDocument/2006/relationships" xmlns:p="http://schemas.openxmlformats.org/presentationml/2006/main">
+  <p:cSld>
+    <p:spTree>
+      <p:nvGrpSpPr>
+        <p:cNvPr id="1" name=""/>
+        <p:cNvGrpSpPr/>
+        <p:nvPr/>
+      </p:nvGrpSpPr>
+      <p:grpSpPr>
+        <a:xfrm>
+          <a:off x="0" y="0"/>
+          <a:ext cx="0" cy="0"/>
+          <a:chOff x="0" y="0"/>
+          <a:chExt cx="0" cy="0"/>
+        </a:xfrm>
+      </p:grpSpPr>
+      <p:sp>
+        <p:nvSpPr>
+          <p:cNvPr id="2" name="Title 1">
+            <a:extLst>
+              <a:ext uri="{FF2B5EF4-FFF2-40B4-BE49-F238E27FC236}">
+                <a16:creationId xmlns:a16="http://schemas.microsoft.com/office/drawing/2014/main" id="{96F17125-800D-3264-4C3A-5142C4E62414}"/>
+              </a:ext>
+            </a:extLst>
+          </p:cNvPr>
+          <p:cNvSpPr>
+            <a:spLocks noGrp="1"/>
+          </p:cNvSpPr>
+          <p:nvPr>
+            <p:ph type="title"/>
+          </p:nvPr>
+        </p:nvSpPr>
+        <p:spPr/>
+        <p:txBody>
+          <a:bodyPr/>
+          <a:lstStyle/>
+          <a:p>
+            <a:r>
+              <a:rPr lang="en-PT" dirty="0"/>
+              <a:t>STLM</a:t>
+            </a:r>
+          </a:p>
+        </p:txBody>
+      </p:sp>
+      <p:sp>
+        <p:nvSpPr>
+          <p:cNvPr id="3" name="Content Placeholder 2">
+            <a:extLst>
+              <a:ext uri="{FF2B5EF4-FFF2-40B4-BE49-F238E27FC236}">
+                <a16:creationId xmlns:a16="http://schemas.microsoft.com/office/drawing/2014/main" id="{FAF16C7A-E699-F41F-DF5A-88F364DCFD7C}"/>
+              </a:ext>
+            </a:extLst>
+          </p:cNvPr>
+          <p:cNvSpPr>
+            <a:spLocks noGrp="1"/>
+          </p:cNvSpPr>
+          <p:nvPr>
+            <p:ph idx="1"/>
+          </p:nvPr>
+        </p:nvSpPr>
+        <p:spPr>
+          <a:xfrm>
+            <a:off x="2231136" y="6088513"/>
+            <a:ext cx="7729728" cy="495167"/>
+          </a:xfrm>
+        </p:spPr>
+        <p:txBody>
+          <a:bodyPr/>
+          <a:lstStyle/>
+          <a:p>
+            <a:r>
+              <a:rPr lang="en-GB" dirty="0"/>
+              <a:t>M</a:t>
+            </a:r>
+            <a:r>
+              <a:rPr lang="en-PT" dirty="0"/>
+              <a:t>eter ljobx test + normalidades</a:t>
+            </a:r>
+          </a:p>
+        </p:txBody>
+      </p:sp>
+      <p:sp>
+        <p:nvSpPr>
+          <p:cNvPr id="4" name="Slide Number Placeholder 3">
+            <a:extLst>
+              <a:ext uri="{FF2B5EF4-FFF2-40B4-BE49-F238E27FC236}">
+                <a16:creationId xmlns:a16="http://schemas.microsoft.com/office/drawing/2014/main" id="{6954A3A0-5E1F-EECF-102F-B19439528961}"/>
+              </a:ext>
+            </a:extLst>
+          </p:cNvPr>
+          <p:cNvSpPr>
+            <a:spLocks noGrp="1"/>
+          </p:cNvSpPr>
+          <p:nvPr>
+            <p:ph type="sldNum" sz="quarter" idx="12"/>
+          </p:nvPr>
+        </p:nvSpPr>
+        <p:spPr/>
+        <p:txBody>
+          <a:bodyPr/>
+          <a:lstStyle/>
+          <a:p>
+            <a:fld id="{8A7A6979-0714-4377-B894-6BE4C2D6E202}" type="slidenum">
+              <a:rPr lang="en-US" smtClean="0"/>
+              <a:pPr/>
+              <a:t>15</a:t>
+            </a:fld>
+            <a:endParaRPr lang="en-US" dirty="0"/>
+          </a:p>
+        </p:txBody>
+      </p:sp>
+      <p:pic>
+        <p:nvPicPr>
+          <p:cNvPr id="5" name="Picture 4">
+            <a:extLst>
+              <a:ext uri="{FF2B5EF4-FFF2-40B4-BE49-F238E27FC236}">
+                <a16:creationId xmlns:a16="http://schemas.microsoft.com/office/drawing/2014/main" id="{2852768D-8FB6-00E3-9468-CA7FF8583247}"/>
+              </a:ext>
+            </a:extLst>
+          </p:cNvPr>
+          <p:cNvPicPr>
+            <a:picLocks noChangeAspect="1"/>
+          </p:cNvPicPr>
+          <p:nvPr/>
+        </p:nvPicPr>
+        <p:blipFill>
+          <a:blip r:embed="rId2"/>
+          <a:stretch>
+            <a:fillRect/>
+          </a:stretch>
+        </p:blipFill>
+        <p:spPr>
+          <a:xfrm>
+            <a:off x="672860" y="2279322"/>
+            <a:ext cx="4297161" cy="3683281"/>
+          </a:xfrm>
+          <a:prstGeom prst="rect">
+            <a:avLst/>
+          </a:prstGeom>
+        </p:spPr>
+      </p:pic>
+      <p:pic>
+        <p:nvPicPr>
+          <p:cNvPr id="6" name="Picture 5">
+            <a:extLst>
+              <a:ext uri="{FF2B5EF4-FFF2-40B4-BE49-F238E27FC236}">
+                <a16:creationId xmlns:a16="http://schemas.microsoft.com/office/drawing/2014/main" id="{2CB2FF41-7B5C-D89A-02B0-F2382BB95328}"/>
+              </a:ext>
+            </a:extLst>
+          </p:cNvPr>
+          <p:cNvPicPr>
+            <a:picLocks noChangeAspect="1"/>
+          </p:cNvPicPr>
+          <p:nvPr/>
+        </p:nvPicPr>
+        <p:blipFill>
+          <a:blip r:embed="rId3"/>
+          <a:stretch>
+            <a:fillRect/>
+          </a:stretch>
+        </p:blipFill>
+        <p:spPr>
+          <a:xfrm>
+            <a:off x="5589917" y="2603769"/>
+            <a:ext cx="5756694" cy="3289539"/>
+          </a:xfrm>
+          <a:prstGeom prst="rect">
+            <a:avLst/>
+          </a:prstGeom>
+        </p:spPr>
+      </p:pic>
+    </p:spTree>
+    <p:extLst>
+      <p:ext uri="{BB962C8B-B14F-4D97-AF65-F5344CB8AC3E}">
+        <p14:creationId xmlns:p14="http://schemas.microsoft.com/office/powerpoint/2010/main" val="1086829013"/>
+      </p:ext>
+    </p:extLst>
+  </p:cSld>
+  <p:clrMapOvr>
+    <a:masterClrMapping/>
+  </p:clrMapOvr>
+</p:sld>
+</file>
+
+<file path=ppt/slides/slide16.xml><?xml version="1.0" encoding="utf-8"?>
+<p:sld xmlns:a="http://schemas.openxmlformats.org/drawingml/2006/main" xmlns:r="http://schemas.openxmlformats.org/officeDocument/2006/relationships" xmlns:p="http://schemas.openxmlformats.org/presentationml/2006/main">
+  <p:cSld>
+    <p:spTree>
+      <p:nvGrpSpPr>
+        <p:cNvPr id="1" name=""/>
+        <p:cNvGrpSpPr/>
+        <p:nvPr/>
+      </p:nvGrpSpPr>
+      <p:grpSpPr>
+        <a:xfrm>
+          <a:off x="0" y="0"/>
+          <a:ext cx="0" cy="0"/>
+          <a:chOff x="0" y="0"/>
+          <a:chExt cx="0" cy="0"/>
+        </a:xfrm>
+      </p:grpSpPr>
+      <p:sp>
+        <p:nvSpPr>
+          <p:cNvPr id="2" name="Title 1">
+            <a:extLst>
+              <a:ext uri="{FF2B5EF4-FFF2-40B4-BE49-F238E27FC236}">
+                <a16:creationId xmlns:a16="http://schemas.microsoft.com/office/drawing/2014/main" id="{7D6CD509-BAC2-1BDA-8B70-939AC903B59F}"/>
+              </a:ext>
+            </a:extLst>
+          </p:cNvPr>
+          <p:cNvSpPr>
+            <a:spLocks noGrp="1"/>
+          </p:cNvSpPr>
+          <p:nvPr>
+            <p:ph type="title"/>
+          </p:nvPr>
+        </p:nvSpPr>
+        <p:spPr/>
+        <p:txBody>
+          <a:bodyPr/>
+          <a:lstStyle/>
+          <a:p>
+            <a:r>
+              <a:rPr lang="en-PT" dirty="0"/>
+              <a:t>Previsão de Observações Futuras</a:t>
+            </a:r>
+          </a:p>
+        </p:txBody>
+      </p:sp>
+      <p:sp>
+        <p:nvSpPr>
+          <p:cNvPr id="3" name="Content Placeholder 2">
+            <a:extLst>
+              <a:ext uri="{FF2B5EF4-FFF2-40B4-BE49-F238E27FC236}">
+                <a16:creationId xmlns:a16="http://schemas.microsoft.com/office/drawing/2014/main" id="{10F50880-08FF-87F1-4D42-777CE189B67C}"/>
+              </a:ext>
+            </a:extLst>
+          </p:cNvPr>
+          <p:cNvSpPr>
+            <a:spLocks noGrp="1"/>
+          </p:cNvSpPr>
+          <p:nvPr>
+            <p:ph idx="1"/>
+          </p:nvPr>
+        </p:nvSpPr>
+        <p:spPr/>
+        <p:txBody>
+          <a:bodyPr/>
+          <a:lstStyle/>
+          <a:p>
+            <a:r>
+              <a:rPr lang="en-PT" dirty="0"/>
+              <a:t>ARIMA(1,1,1)(1,1,1)[12]</a:t>
+            </a:r>
+          </a:p>
+          <a:p>
+            <a:r>
+              <a:rPr lang="en-PT" dirty="0"/>
+              <a:t>STLM(ARIMA)</a:t>
+            </a:r>
+          </a:p>
+        </p:txBody>
+      </p:sp>
+      <p:sp>
+        <p:nvSpPr>
+          <p:cNvPr id="4" name="Slide Number Placeholder 3">
+            <a:extLst>
+              <a:ext uri="{FF2B5EF4-FFF2-40B4-BE49-F238E27FC236}">
+                <a16:creationId xmlns:a16="http://schemas.microsoft.com/office/drawing/2014/main" id="{4BC06C95-933F-B087-1FEF-8C0396EA031A}"/>
+              </a:ext>
+            </a:extLst>
+          </p:cNvPr>
+          <p:cNvSpPr>
+            <a:spLocks noGrp="1"/>
+          </p:cNvSpPr>
+          <p:nvPr>
+            <p:ph type="sldNum" sz="quarter" idx="12"/>
+          </p:nvPr>
+        </p:nvSpPr>
+        <p:spPr/>
+        <p:txBody>
+          <a:bodyPr/>
+          <a:lstStyle/>
+          <a:p>
+            <a:fld id="{8A7A6979-0714-4377-B894-6BE4C2D6E202}" type="slidenum">
+              <a:rPr lang="en-US" smtClean="0"/>
+              <a:pPr/>
+              <a:t>16</a:t>
+            </a:fld>
+            <a:endParaRPr lang="en-US" dirty="0"/>
+          </a:p>
+        </p:txBody>
+      </p:sp>
+    </p:spTree>
+    <p:extLst>
+      <p:ext uri="{BB962C8B-B14F-4D97-AF65-F5344CB8AC3E}">
+        <p14:creationId xmlns:p14="http://schemas.microsoft.com/office/powerpoint/2010/main" val="2190830088"/>
+      </p:ext>
+    </p:extLst>
+  </p:cSld>
+  <p:clrMapOvr>
+    <a:masterClrMapping/>
+  </p:clrMapOvr>
+</p:sld>
+</file>
+
+<file path=ppt/slides/slide17.xml><?xml version="1.0" encoding="utf-8"?>
+<p:sld xmlns:a="http://schemas.openxmlformats.org/drawingml/2006/main" xmlns:r="http://schemas.openxmlformats.org/officeDocument/2006/relationships" xmlns:p="http://schemas.openxmlformats.org/presentationml/2006/main">
+  <p:cSld>
+    <p:spTree>
+      <p:nvGrpSpPr>
+        <p:cNvPr id="1" name=""/>
+        <p:cNvGrpSpPr/>
+        <p:nvPr/>
+      </p:nvGrpSpPr>
+      <p:grpSpPr>
+        <a:xfrm>
+          <a:off x="0" y="0"/>
+          <a:ext cx="0" cy="0"/>
+          <a:chOff x="0" y="0"/>
+          <a:chExt cx="0" cy="0"/>
+        </a:xfrm>
+      </p:grpSpPr>
+      <p:sp>
+        <p:nvSpPr>
+          <p:cNvPr id="2" name="Title 1">
+            <a:extLst>
+              <a:ext uri="{FF2B5EF4-FFF2-40B4-BE49-F238E27FC236}">
+                <a16:creationId xmlns:a16="http://schemas.microsoft.com/office/drawing/2014/main" id="{D121E3D8-72F6-E132-CC76-E4FD31D5CD3A}"/>
+              </a:ext>
+            </a:extLst>
+          </p:cNvPr>
+          <p:cNvSpPr>
+            <a:spLocks noGrp="1"/>
+          </p:cNvSpPr>
+          <p:nvPr>
+            <p:ph type="title"/>
+          </p:nvPr>
+        </p:nvSpPr>
+        <p:spPr/>
+        <p:txBody>
+          <a:bodyPr/>
+          <a:lstStyle/>
+          <a:p>
+            <a:r>
+              <a:rPr lang="en-PT" dirty="0"/>
+              <a:t>Previsão de Observações Futuras</a:t>
+            </a:r>
+          </a:p>
+        </p:txBody>
+      </p:sp>
+      <p:sp>
+        <p:nvSpPr>
+          <p:cNvPr id="4" name="Slide Number Placeholder 3">
+            <a:extLst>
+              <a:ext uri="{FF2B5EF4-FFF2-40B4-BE49-F238E27FC236}">
+                <a16:creationId xmlns:a16="http://schemas.microsoft.com/office/drawing/2014/main" id="{CB1EFA2D-0BB0-7288-0A6D-C3AE8DE2AB41}"/>
+              </a:ext>
+            </a:extLst>
+          </p:cNvPr>
+          <p:cNvSpPr>
+            <a:spLocks noGrp="1"/>
+          </p:cNvSpPr>
+          <p:nvPr>
+            <p:ph type="sldNum" sz="quarter" idx="12"/>
+          </p:nvPr>
+        </p:nvSpPr>
+        <p:spPr/>
+        <p:txBody>
+          <a:bodyPr/>
+          <a:lstStyle/>
+          <a:p>
+            <a:fld id="{8A7A6979-0714-4377-B894-6BE4C2D6E202}" type="slidenum">
+              <a:rPr lang="en-US" smtClean="0"/>
+              <a:pPr/>
+              <a:t>17</a:t>
+            </a:fld>
+            <a:endParaRPr lang="en-US" dirty="0"/>
+          </a:p>
+        </p:txBody>
+      </p:sp>
+      <p:pic>
+        <p:nvPicPr>
+          <p:cNvPr id="5" name="Picture 4">
+            <a:extLst>
+              <a:ext uri="{FF2B5EF4-FFF2-40B4-BE49-F238E27FC236}">
+                <a16:creationId xmlns:a16="http://schemas.microsoft.com/office/drawing/2014/main" id="{8CE233F7-DC0C-2B15-93FB-C5FD2C605746}"/>
+              </a:ext>
+            </a:extLst>
+          </p:cNvPr>
+          <p:cNvPicPr>
+            <a:picLocks noChangeAspect="1"/>
+          </p:cNvPicPr>
+          <p:nvPr/>
+        </p:nvPicPr>
+        <p:blipFill>
+          <a:blip r:embed="rId2"/>
+          <a:stretch>
+            <a:fillRect/>
+          </a:stretch>
+        </p:blipFill>
+        <p:spPr>
+          <a:xfrm>
+            <a:off x="6688997" y="1849557"/>
+            <a:ext cx="4425351" cy="2528772"/>
+          </a:xfrm>
+          <a:prstGeom prst="rect">
+            <a:avLst/>
+          </a:prstGeom>
+        </p:spPr>
+      </p:pic>
+      <p:pic>
+        <p:nvPicPr>
+          <p:cNvPr id="6" name="Picture 5">
+            <a:extLst>
+              <a:ext uri="{FF2B5EF4-FFF2-40B4-BE49-F238E27FC236}">
+                <a16:creationId xmlns:a16="http://schemas.microsoft.com/office/drawing/2014/main" id="{9B211940-919A-0A4D-CFC2-B14B107DC89A}"/>
+              </a:ext>
+            </a:extLst>
+          </p:cNvPr>
+          <p:cNvPicPr>
+            <a:picLocks noChangeAspect="1"/>
+          </p:cNvPicPr>
+          <p:nvPr/>
+        </p:nvPicPr>
+        <p:blipFill>
+          <a:blip r:embed="rId3"/>
+          <a:stretch>
+            <a:fillRect/>
+          </a:stretch>
+        </p:blipFill>
+        <p:spPr>
+          <a:xfrm>
+            <a:off x="930154" y="4074474"/>
+            <a:ext cx="4871170" cy="2783526"/>
+          </a:xfrm>
+          <a:prstGeom prst="rect">
+            <a:avLst/>
+          </a:prstGeom>
+        </p:spPr>
+      </p:pic>
+      <p:pic>
+        <p:nvPicPr>
+          <p:cNvPr id="7" name="Content Placeholder 5">
+            <a:extLst>
+              <a:ext uri="{FF2B5EF4-FFF2-40B4-BE49-F238E27FC236}">
+                <a16:creationId xmlns:a16="http://schemas.microsoft.com/office/drawing/2014/main" id="{06F45EE2-1F77-AEF7-C186-B7EA3D0DCF22}"/>
+              </a:ext>
+            </a:extLst>
+          </p:cNvPr>
+          <p:cNvPicPr>
+            <a:picLocks noGrp="1" noChangeAspect="1"/>
+          </p:cNvPicPr>
+          <p:nvPr>
+            <p:ph idx="1"/>
+          </p:nvPr>
+        </p:nvPicPr>
+        <p:blipFill>
+          <a:blip r:embed="rId4"/>
+          <a:stretch>
+            <a:fillRect/>
+          </a:stretch>
+        </p:blipFill>
+        <p:spPr>
+          <a:xfrm>
+            <a:off x="1515050" y="1709715"/>
+            <a:ext cx="4606288" cy="2632165"/>
+          </a:xfrm>
+        </p:spPr>
+      </p:pic>
+      <p:pic>
+        <p:nvPicPr>
+          <p:cNvPr id="8" name="Picture 7">
+            <a:extLst>
+              <a:ext uri="{FF2B5EF4-FFF2-40B4-BE49-F238E27FC236}">
+                <a16:creationId xmlns:a16="http://schemas.microsoft.com/office/drawing/2014/main" id="{B03A110B-6E25-D030-D35D-08E24B1AF4A4}"/>
+              </a:ext>
+            </a:extLst>
+          </p:cNvPr>
+          <p:cNvPicPr>
+            <a:picLocks noChangeAspect="1"/>
+          </p:cNvPicPr>
+          <p:nvPr/>
+        </p:nvPicPr>
+        <p:blipFill>
+          <a:blip r:embed="rId5"/>
+          <a:stretch>
+            <a:fillRect/>
+          </a:stretch>
+        </p:blipFill>
+        <p:spPr>
+          <a:xfrm>
+            <a:off x="6706234" y="4074474"/>
+            <a:ext cx="4407185" cy="2518391"/>
+          </a:xfrm>
+          <a:prstGeom prst="rect">
+            <a:avLst/>
+          </a:prstGeom>
+        </p:spPr>
+      </p:pic>
+    </p:spTree>
+    <p:extLst>
+      <p:ext uri="{BB962C8B-B14F-4D97-AF65-F5344CB8AC3E}">
+        <p14:creationId xmlns:p14="http://schemas.microsoft.com/office/powerpoint/2010/main" val="952282663"/>
+      </p:ext>
+    </p:extLst>
+  </p:cSld>
+  <p:clrMapOvr>
+    <a:masterClrMapping/>
+  </p:clrMapOvr>
+</p:sld>
+</file>
+
+<file path=ppt/slides/slide18.xml><?xml version="1.0" encoding="utf-8"?>
+<p:sld xmlns:a="http://schemas.openxmlformats.org/drawingml/2006/main" xmlns:r="http://schemas.openxmlformats.org/officeDocument/2006/relationships" xmlns:p="http://schemas.openxmlformats.org/presentationml/2006/main">
+  <p:cSld>
+    <p:spTree>
+      <p:nvGrpSpPr>
+        <p:cNvPr id="1" name=""/>
+        <p:cNvGrpSpPr/>
+        <p:nvPr/>
+      </p:nvGrpSpPr>
+      <p:grpSpPr>
+        <a:xfrm>
+          <a:off x="0" y="0"/>
+          <a:ext cx="0" cy="0"/>
+          <a:chOff x="0" y="0"/>
+          <a:chExt cx="0" cy="0"/>
+        </a:xfrm>
+      </p:grpSpPr>
+      <p:sp>
+        <p:nvSpPr>
+          <p:cNvPr id="2" name="Title 1">
+            <a:extLst>
+              <a:ext uri="{FF2B5EF4-FFF2-40B4-BE49-F238E27FC236}">
+                <a16:creationId xmlns:a16="http://schemas.microsoft.com/office/drawing/2014/main" id="{DF07FED4-5FFE-8D45-DE73-CE55FB9ACF1D}"/>
+              </a:ext>
+            </a:extLst>
+          </p:cNvPr>
+          <p:cNvSpPr>
+            <a:spLocks noGrp="1"/>
+          </p:cNvSpPr>
+          <p:nvPr>
+            <p:ph type="title"/>
+          </p:nvPr>
+        </p:nvSpPr>
+        <p:spPr/>
+        <p:txBody>
+          <a:bodyPr/>
+          <a:lstStyle/>
+          <a:p>
+            <a:r>
+              <a:rPr lang="en-PT" dirty="0"/>
+              <a:t>Previsão de Observações Futuras</a:t>
+            </a:r>
+          </a:p>
+        </p:txBody>
+      </p:sp>
+      <p:sp>
+        <p:nvSpPr>
+          <p:cNvPr id="3" name="Content Placeholder 2">
+            <a:extLst>
+              <a:ext uri="{FF2B5EF4-FFF2-40B4-BE49-F238E27FC236}">
+                <a16:creationId xmlns:a16="http://schemas.microsoft.com/office/drawing/2014/main" id="{719385F4-9AE1-B467-6684-F3D2776C56F5}"/>
+              </a:ext>
+            </a:extLst>
+          </p:cNvPr>
+          <p:cNvSpPr>
+            <a:spLocks noGrp="1"/>
+          </p:cNvSpPr>
+          <p:nvPr>
+            <p:ph idx="1"/>
+          </p:nvPr>
+        </p:nvSpPr>
+        <p:spPr/>
+        <p:txBody>
+          <a:bodyPr/>
+          <a:lstStyle/>
+          <a:p>
+            <a:r>
+              <a:rPr lang="en-GB" dirty="0"/>
+              <a:t>M</a:t>
+            </a:r>
+            <a:r>
+              <a:rPr lang="en-PT" dirty="0"/>
+              <a:t>eter métricas de teste e treino para cada um deles (tabela)</a:t>
+            </a:r>
+          </a:p>
+        </p:txBody>
+      </p:sp>
+      <p:sp>
+        <p:nvSpPr>
+          <p:cNvPr id="4" name="Slide Number Placeholder 3">
+            <a:extLst>
+              <a:ext uri="{FF2B5EF4-FFF2-40B4-BE49-F238E27FC236}">
+                <a16:creationId xmlns:a16="http://schemas.microsoft.com/office/drawing/2014/main" id="{9CEE87AD-9993-FAAF-D079-5E9AA0CCB4FB}"/>
+              </a:ext>
+            </a:extLst>
+          </p:cNvPr>
+          <p:cNvSpPr>
+            <a:spLocks noGrp="1"/>
+          </p:cNvSpPr>
+          <p:nvPr>
+            <p:ph type="sldNum" sz="quarter" idx="12"/>
+          </p:nvPr>
+        </p:nvSpPr>
+        <p:spPr/>
+        <p:txBody>
+          <a:bodyPr/>
+          <a:lstStyle/>
+          <a:p>
+            <a:fld id="{8A7A6979-0714-4377-B894-6BE4C2D6E202}" type="slidenum">
+              <a:rPr lang="en-US" smtClean="0"/>
+              <a:pPr/>
+              <a:t>18</a:t>
+            </a:fld>
+            <a:endParaRPr lang="en-US" dirty="0"/>
+          </a:p>
+        </p:txBody>
+      </p:sp>
+    </p:spTree>
+    <p:extLst>
+      <p:ext uri="{BB962C8B-B14F-4D97-AF65-F5344CB8AC3E}">
+        <p14:creationId xmlns:p14="http://schemas.microsoft.com/office/powerpoint/2010/main" val="2038283466"/>
+      </p:ext>
+    </p:extLst>
+  </p:cSld>
+  <p:clrMapOvr>
+    <a:masterClrMapping/>
+  </p:clrMapOvr>
+</p:sld>
+</file>
+
+<file path=ppt/slides/slide19.xml><?xml version="1.0" encoding="utf-8"?>
+<p:sld xmlns:a="http://schemas.openxmlformats.org/drawingml/2006/main" xmlns:r="http://schemas.openxmlformats.org/officeDocument/2006/relationships" xmlns:p="http://schemas.openxmlformats.org/presentationml/2006/main">
+  <p:cSld>
+    <p:spTree>
+      <p:nvGrpSpPr>
+        <p:cNvPr id="1" name=""/>
+        <p:cNvGrpSpPr/>
+        <p:nvPr/>
+      </p:nvGrpSpPr>
+      <p:grpSpPr>
+        <a:xfrm>
+          <a:off x="0" y="0"/>
+          <a:ext cx="0" cy="0"/>
+          <a:chOff x="0" y="0"/>
+          <a:chExt cx="0" cy="0"/>
+        </a:xfrm>
+      </p:grpSpPr>
+      <p:sp>
+        <p:nvSpPr>
+          <p:cNvPr id="2" name="Title 1">
+            <a:extLst>
+              <a:ext uri="{FF2B5EF4-FFF2-40B4-BE49-F238E27FC236}">
+                <a16:creationId xmlns:a16="http://schemas.microsoft.com/office/drawing/2014/main" id="{25B27C9A-F383-59C2-179C-D2F24630AA71}"/>
+              </a:ext>
+            </a:extLst>
+          </p:cNvPr>
+          <p:cNvSpPr>
+            <a:spLocks noGrp="1"/>
+          </p:cNvSpPr>
+          <p:nvPr>
+            <p:ph type="title"/>
+          </p:nvPr>
+        </p:nvSpPr>
+        <p:spPr/>
+        <p:txBody>
+          <a:bodyPr/>
+          <a:lstStyle/>
+          <a:p>
+            <a:r>
+              <a:rPr lang="en-PT" dirty="0"/>
+              <a:t>Previsão de Observações Futuras</a:t>
+            </a:r>
+          </a:p>
+        </p:txBody>
+      </p:sp>
+      <p:sp>
+        <p:nvSpPr>
+          <p:cNvPr id="3" name="Content Placeholder 2">
+            <a:extLst>
+              <a:ext uri="{FF2B5EF4-FFF2-40B4-BE49-F238E27FC236}">
+                <a16:creationId xmlns:a16="http://schemas.microsoft.com/office/drawing/2014/main" id="{E2971BBE-7F5D-87F1-A17B-B3577935C0AA}"/>
+              </a:ext>
+            </a:extLst>
+          </p:cNvPr>
+          <p:cNvSpPr>
+            <a:spLocks noGrp="1"/>
+          </p:cNvSpPr>
+          <p:nvPr>
+            <p:ph idx="1"/>
+          </p:nvPr>
+        </p:nvSpPr>
+        <p:spPr>
+          <a:xfrm>
+            <a:off x="592117" y="2638043"/>
+            <a:ext cx="4721755" cy="3101983"/>
+          </a:xfrm>
+        </p:spPr>
+        <p:txBody>
+          <a:bodyPr/>
+          <a:lstStyle/>
+          <a:p>
+            <a:pPr marL="0" indent="0">
+              <a:buNone/>
+            </a:pPr>
+            <a:r>
+              <a:rPr lang="en-PT" dirty="0"/>
+              <a:t>Intervalos de previsão</a:t>
+            </a:r>
+          </a:p>
+          <a:p>
+            <a:r>
+              <a:rPr lang="en-PT" dirty="0"/>
+              <a:t>Ambos os modelos com cobertura total</a:t>
+            </a:r>
+          </a:p>
+          <a:p>
+            <a:r>
+              <a:rPr lang="en-PT" dirty="0"/>
+              <a:t>Amplitude média:</a:t>
+            </a:r>
+          </a:p>
+          <a:p>
+            <a:pPr lvl="1"/>
+            <a:r>
+              <a:rPr lang="en-PT" dirty="0"/>
+              <a:t>SARIMA: 4378</a:t>
+            </a:r>
+          </a:p>
+          <a:p>
+            <a:pPr lvl="1"/>
+            <a:r>
+              <a:rPr lang="en-PT" dirty="0"/>
+              <a:t>STLM: 3639</a:t>
+            </a:r>
+          </a:p>
+        </p:txBody>
+      </p:sp>
+      <p:sp>
+        <p:nvSpPr>
+          <p:cNvPr id="4" name="Slide Number Placeholder 3">
+            <a:extLst>
+              <a:ext uri="{FF2B5EF4-FFF2-40B4-BE49-F238E27FC236}">
+                <a16:creationId xmlns:a16="http://schemas.microsoft.com/office/drawing/2014/main" id="{6EB5527F-1452-64F9-1CDC-D1D11A0CCCAE}"/>
+              </a:ext>
+            </a:extLst>
+          </p:cNvPr>
+          <p:cNvSpPr>
+            <a:spLocks noGrp="1"/>
+          </p:cNvSpPr>
+          <p:nvPr>
+            <p:ph type="sldNum" sz="quarter" idx="12"/>
+          </p:nvPr>
+        </p:nvSpPr>
+        <p:spPr/>
+        <p:txBody>
+          <a:bodyPr/>
+          <a:lstStyle/>
+          <a:p>
+            <a:fld id="{8A7A6979-0714-4377-B894-6BE4C2D6E202}" type="slidenum">
+              <a:rPr lang="en-US" smtClean="0"/>
+              <a:pPr/>
+              <a:t>19</a:t>
+            </a:fld>
+            <a:endParaRPr lang="en-US" dirty="0"/>
+          </a:p>
+        </p:txBody>
+      </p:sp>
+      <p:pic>
+        <p:nvPicPr>
+          <p:cNvPr id="5" name="Picture 4">
+            <a:extLst>
+              <a:ext uri="{FF2B5EF4-FFF2-40B4-BE49-F238E27FC236}">
+                <a16:creationId xmlns:a16="http://schemas.microsoft.com/office/drawing/2014/main" id="{99D96E7C-4393-9311-C20A-78416316F7C7}"/>
+              </a:ext>
+            </a:extLst>
+          </p:cNvPr>
+          <p:cNvPicPr>
+            <a:picLocks noChangeAspect="1"/>
+          </p:cNvPicPr>
+          <p:nvPr/>
+        </p:nvPicPr>
+        <p:blipFill>
+          <a:blip r:embed="rId2"/>
+          <a:stretch>
+            <a:fillRect/>
+          </a:stretch>
+        </p:blipFill>
+        <p:spPr>
+          <a:xfrm>
+            <a:off x="5612690" y="2360235"/>
+            <a:ext cx="6400800" cy="3657600"/>
+          </a:xfrm>
+          <a:prstGeom prst="rect">
+            <a:avLst/>
+          </a:prstGeom>
+        </p:spPr>
+      </p:pic>
+    </p:spTree>
+    <p:extLst>
+      <p:ext uri="{BB962C8B-B14F-4D97-AF65-F5344CB8AC3E}">
+        <p14:creationId xmlns:p14="http://schemas.microsoft.com/office/powerpoint/2010/main" val="2243093324"/>
       </p:ext>
     </p:extLst>
   </p:cSld>
@@ -3707,7 +5612,10 @@
           <a:bodyPr/>
           <a:lstStyle/>
           <a:p>
-            <a:endParaRPr lang="en-PT"/>
+            <a:r>
+              <a:rPr lang="en-PT" dirty="0"/>
+              <a:t>Enquadramento / Motivação</a:t>
+            </a:r>
           </a:p>
         </p:txBody>
       </p:sp>
@@ -3770,6 +5678,1378 @@
     <p:extLst>
       <p:ext uri="{BB962C8B-B14F-4D97-AF65-F5344CB8AC3E}">
         <p14:creationId xmlns:p14="http://schemas.microsoft.com/office/powerpoint/2010/main" val="2077514694"/>
+      </p:ext>
+    </p:extLst>
+  </p:cSld>
+  <p:clrMapOvr>
+    <a:masterClrMapping/>
+  </p:clrMapOvr>
+</p:sld>
+</file>
+
+<file path=ppt/slides/slide20.xml><?xml version="1.0" encoding="utf-8"?>
+<p:sld xmlns:a="http://schemas.openxmlformats.org/drawingml/2006/main" xmlns:r="http://schemas.openxmlformats.org/officeDocument/2006/relationships" xmlns:p="http://schemas.openxmlformats.org/presentationml/2006/main">
+  <p:cSld>
+    <p:spTree>
+      <p:nvGrpSpPr>
+        <p:cNvPr id="1" name=""/>
+        <p:cNvGrpSpPr/>
+        <p:nvPr/>
+      </p:nvGrpSpPr>
+      <p:grpSpPr>
+        <a:xfrm>
+          <a:off x="0" y="0"/>
+          <a:ext cx="0" cy="0"/>
+          <a:chOff x="0" y="0"/>
+          <a:chExt cx="0" cy="0"/>
+        </a:xfrm>
+      </p:grpSpPr>
+      <p:sp>
+        <p:nvSpPr>
+          <p:cNvPr id="2" name="Title 1">
+            <a:extLst>
+              <a:ext uri="{FF2B5EF4-FFF2-40B4-BE49-F238E27FC236}">
+                <a16:creationId xmlns:a16="http://schemas.microsoft.com/office/drawing/2014/main" id="{F8B11C9A-6F0B-0F67-0243-23BBC78648EE}"/>
+              </a:ext>
+            </a:extLst>
+          </p:cNvPr>
+          <p:cNvSpPr>
+            <a:spLocks noGrp="1"/>
+          </p:cNvSpPr>
+          <p:nvPr>
+            <p:ph type="title"/>
+          </p:nvPr>
+        </p:nvSpPr>
+        <p:spPr/>
+        <p:txBody>
+          <a:bodyPr/>
+          <a:lstStyle/>
+          <a:p>
+            <a:r>
+              <a:rPr lang="en-PT" dirty="0"/>
+              <a:t>discussão</a:t>
+            </a:r>
+          </a:p>
+        </p:txBody>
+      </p:sp>
+      <p:sp>
+        <p:nvSpPr>
+          <p:cNvPr id="3" name="Content Placeholder 2">
+            <a:extLst>
+              <a:ext uri="{FF2B5EF4-FFF2-40B4-BE49-F238E27FC236}">
+                <a16:creationId xmlns:a16="http://schemas.microsoft.com/office/drawing/2014/main" id="{9771B964-4462-9626-3781-F8C674D1D6AF}"/>
+              </a:ext>
+            </a:extLst>
+          </p:cNvPr>
+          <p:cNvSpPr>
+            <a:spLocks noGrp="1"/>
+          </p:cNvSpPr>
+          <p:nvPr>
+            <p:ph idx="1"/>
+          </p:nvPr>
+        </p:nvSpPr>
+        <p:spPr/>
+        <p:txBody>
+          <a:bodyPr/>
+          <a:lstStyle/>
+          <a:p>
+            <a:r>
+              <a:rPr lang="en-GB" dirty="0"/>
+              <a:t>E</a:t>
+            </a:r>
+            <a:r>
+              <a:rPr lang="en-PT" dirty="0"/>
+              <a:t>scolha do melhor modelo + justificação</a:t>
+            </a:r>
+          </a:p>
+        </p:txBody>
+      </p:sp>
+      <p:sp>
+        <p:nvSpPr>
+          <p:cNvPr id="4" name="Slide Number Placeholder 3">
+            <a:extLst>
+              <a:ext uri="{FF2B5EF4-FFF2-40B4-BE49-F238E27FC236}">
+                <a16:creationId xmlns:a16="http://schemas.microsoft.com/office/drawing/2014/main" id="{B5474295-FD44-721B-3566-259C5C84E641}"/>
+              </a:ext>
+            </a:extLst>
+          </p:cNvPr>
+          <p:cNvSpPr>
+            <a:spLocks noGrp="1"/>
+          </p:cNvSpPr>
+          <p:nvPr>
+            <p:ph type="sldNum" sz="quarter" idx="12"/>
+          </p:nvPr>
+        </p:nvSpPr>
+        <p:spPr/>
+        <p:txBody>
+          <a:bodyPr/>
+          <a:lstStyle/>
+          <a:p>
+            <a:fld id="{8A7A6979-0714-4377-B894-6BE4C2D6E202}" type="slidenum">
+              <a:rPr lang="en-US" smtClean="0"/>
+              <a:pPr/>
+              <a:t>20</a:t>
+            </a:fld>
+            <a:endParaRPr lang="en-US" dirty="0"/>
+          </a:p>
+        </p:txBody>
+      </p:sp>
+    </p:spTree>
+    <p:extLst>
+      <p:ext uri="{BB962C8B-B14F-4D97-AF65-F5344CB8AC3E}">
+        <p14:creationId xmlns:p14="http://schemas.microsoft.com/office/powerpoint/2010/main" val="4084087018"/>
+      </p:ext>
+    </p:extLst>
+  </p:cSld>
+  <p:clrMapOvr>
+    <a:masterClrMapping/>
+  </p:clrMapOvr>
+</p:sld>
+</file>
+
+<file path=ppt/slides/slide3.xml><?xml version="1.0" encoding="utf-8"?>
+<p:sld xmlns:a="http://schemas.openxmlformats.org/drawingml/2006/main" xmlns:r="http://schemas.openxmlformats.org/officeDocument/2006/relationships" xmlns:p="http://schemas.openxmlformats.org/presentationml/2006/main">
+  <p:cSld>
+    <p:spTree>
+      <p:nvGrpSpPr>
+        <p:cNvPr id="1" name=""/>
+        <p:cNvGrpSpPr/>
+        <p:nvPr/>
+      </p:nvGrpSpPr>
+      <p:grpSpPr>
+        <a:xfrm>
+          <a:off x="0" y="0"/>
+          <a:ext cx="0" cy="0"/>
+          <a:chOff x="0" y="0"/>
+          <a:chExt cx="0" cy="0"/>
+        </a:xfrm>
+      </p:grpSpPr>
+      <p:sp>
+        <p:nvSpPr>
+          <p:cNvPr id="2" name="Title 1">
+            <a:extLst>
+              <a:ext uri="{FF2B5EF4-FFF2-40B4-BE49-F238E27FC236}">
+                <a16:creationId xmlns:a16="http://schemas.microsoft.com/office/drawing/2014/main" id="{65E8D0CC-ADD0-7AA2-B89A-A1592D8CE3CC}"/>
+              </a:ext>
+            </a:extLst>
+          </p:cNvPr>
+          <p:cNvSpPr>
+            <a:spLocks noGrp="1"/>
+          </p:cNvSpPr>
+          <p:nvPr>
+            <p:ph type="title"/>
+          </p:nvPr>
+        </p:nvSpPr>
+        <p:spPr/>
+        <p:txBody>
+          <a:bodyPr/>
+          <a:lstStyle/>
+          <a:p>
+            <a:r>
+              <a:rPr lang="en-PT" dirty="0"/>
+              <a:t>Análise Exploratória dos Dados</a:t>
+            </a:r>
+          </a:p>
+        </p:txBody>
+      </p:sp>
+      <p:sp>
+        <p:nvSpPr>
+          <p:cNvPr id="3" name="Content Placeholder 2">
+            <a:extLst>
+              <a:ext uri="{FF2B5EF4-FFF2-40B4-BE49-F238E27FC236}">
+                <a16:creationId xmlns:a16="http://schemas.microsoft.com/office/drawing/2014/main" id="{5973DBDC-37C7-EF80-01A4-FE42238D9F9E}"/>
+              </a:ext>
+            </a:extLst>
+          </p:cNvPr>
+          <p:cNvSpPr>
+            <a:spLocks noGrp="1"/>
+          </p:cNvSpPr>
+          <p:nvPr>
+            <p:ph idx="1"/>
+          </p:nvPr>
+        </p:nvSpPr>
+        <p:spPr>
+          <a:xfrm>
+            <a:off x="446403" y="2263470"/>
+            <a:ext cx="4037462" cy="3542419"/>
+          </a:xfrm>
+        </p:spPr>
+        <p:txBody>
+          <a:bodyPr>
+            <a:normAutofit/>
+          </a:bodyPr>
+          <a:lstStyle/>
+          <a:p>
+            <a:r>
+              <a:rPr lang="en-GB" dirty="0"/>
+              <a:t>C</a:t>
+            </a:r>
+            <a:r>
+              <a:rPr lang="en-PT" dirty="0"/>
+              <a:t>onsumo mensal de eletricidade (GWh) em Espanha (206 obs.)</a:t>
+            </a:r>
+          </a:p>
+          <a:p>
+            <a:r>
+              <a:rPr lang="en-GB" dirty="0"/>
+              <a:t>J</a:t>
+            </a:r>
+            <a:r>
+              <a:rPr lang="en-PT" dirty="0"/>
+              <a:t>aneiro de 2008 a fevereiro de 2025</a:t>
+            </a:r>
+          </a:p>
+          <a:p>
+            <a:r>
+              <a:rPr lang="en-PT" dirty="0"/>
+              <a:t>Separação em teste e treino (80/20)</a:t>
+            </a:r>
+          </a:p>
+          <a:p>
+            <a:endParaRPr lang="en-PT" dirty="0"/>
+          </a:p>
+          <a:p>
+            <a:r>
+              <a:rPr lang="en-PT" dirty="0"/>
+              <a:t>Variância constante TALVEZ</a:t>
+            </a:r>
+          </a:p>
+          <a:p>
+            <a:r>
+              <a:rPr lang="en-PT" dirty="0"/>
+              <a:t>Sazonalidade SIM</a:t>
+            </a:r>
+          </a:p>
+          <a:p>
+            <a:r>
+              <a:rPr lang="en-PT" dirty="0"/>
+              <a:t>Tendência TALVEZ</a:t>
+            </a:r>
+          </a:p>
+          <a:p>
+            <a:pPr marL="0" indent="0">
+              <a:buNone/>
+            </a:pPr>
+            <a:endParaRPr lang="en-PT" dirty="0"/>
+          </a:p>
+        </p:txBody>
+      </p:sp>
+      <p:sp>
+        <p:nvSpPr>
+          <p:cNvPr id="4" name="Slide Number Placeholder 3">
+            <a:extLst>
+              <a:ext uri="{FF2B5EF4-FFF2-40B4-BE49-F238E27FC236}">
+                <a16:creationId xmlns:a16="http://schemas.microsoft.com/office/drawing/2014/main" id="{425822E4-D610-308F-EAB5-826D2A3E6B6B}"/>
+              </a:ext>
+            </a:extLst>
+          </p:cNvPr>
+          <p:cNvSpPr>
+            <a:spLocks noGrp="1"/>
+          </p:cNvSpPr>
+          <p:nvPr>
+            <p:ph type="sldNum" sz="quarter" idx="12"/>
+          </p:nvPr>
+        </p:nvSpPr>
+        <p:spPr/>
+        <p:txBody>
+          <a:bodyPr/>
+          <a:lstStyle/>
+          <a:p>
+            <a:fld id="{8A7A6979-0714-4377-B894-6BE4C2D6E202}" type="slidenum">
+              <a:rPr lang="en-US" smtClean="0"/>
+              <a:pPr/>
+              <a:t>3</a:t>
+            </a:fld>
+            <a:endParaRPr lang="en-US" dirty="0"/>
+          </a:p>
+        </p:txBody>
+      </p:sp>
+      <p:pic>
+        <p:nvPicPr>
+          <p:cNvPr id="5" name="Picture 4">
+            <a:extLst>
+              <a:ext uri="{FF2B5EF4-FFF2-40B4-BE49-F238E27FC236}">
+                <a16:creationId xmlns:a16="http://schemas.microsoft.com/office/drawing/2014/main" id="{757CC790-6D73-F6D2-AACC-9E405772CBA3}"/>
+              </a:ext>
+            </a:extLst>
+          </p:cNvPr>
+          <p:cNvPicPr>
+            <a:picLocks noChangeAspect="1"/>
+          </p:cNvPicPr>
+          <p:nvPr/>
+        </p:nvPicPr>
+        <p:blipFill>
+          <a:blip r:embed="rId2"/>
+          <a:stretch>
+            <a:fillRect/>
+          </a:stretch>
+        </p:blipFill>
+        <p:spPr>
+          <a:xfrm>
+            <a:off x="6596054" y="1875493"/>
+            <a:ext cx="4345748" cy="2483285"/>
+          </a:xfrm>
+          <a:prstGeom prst="rect">
+            <a:avLst/>
+          </a:prstGeom>
+        </p:spPr>
+      </p:pic>
+      <p:pic>
+        <p:nvPicPr>
+          <p:cNvPr id="6" name="Content Placeholder 5">
+            <a:extLst>
+              <a:ext uri="{FF2B5EF4-FFF2-40B4-BE49-F238E27FC236}">
+                <a16:creationId xmlns:a16="http://schemas.microsoft.com/office/drawing/2014/main" id="{BE9DD2E6-222E-A3A6-FBB4-901B4A0963F9}"/>
+              </a:ext>
+            </a:extLst>
+          </p:cNvPr>
+          <p:cNvPicPr>
+            <a:picLocks noChangeAspect="1"/>
+          </p:cNvPicPr>
+          <p:nvPr/>
+        </p:nvPicPr>
+        <p:blipFill>
+          <a:blip r:embed="rId3"/>
+          <a:stretch>
+            <a:fillRect/>
+          </a:stretch>
+        </p:blipFill>
+        <p:spPr>
+          <a:xfrm>
+            <a:off x="6920504" y="4471196"/>
+            <a:ext cx="3696847" cy="2112484"/>
+          </a:xfrm>
+          <a:prstGeom prst="rect">
+            <a:avLst/>
+          </a:prstGeom>
+        </p:spPr>
+      </p:pic>
+    </p:spTree>
+    <p:extLst>
+      <p:ext uri="{BB962C8B-B14F-4D97-AF65-F5344CB8AC3E}">
+        <p14:creationId xmlns:p14="http://schemas.microsoft.com/office/powerpoint/2010/main" val="3414757488"/>
+      </p:ext>
+    </p:extLst>
+  </p:cSld>
+  <p:clrMapOvr>
+    <a:masterClrMapping/>
+  </p:clrMapOvr>
+</p:sld>
+</file>
+
+<file path=ppt/slides/slide4.xml><?xml version="1.0" encoding="utf-8"?>
+<p:sld xmlns:a="http://schemas.openxmlformats.org/drawingml/2006/main" xmlns:r="http://schemas.openxmlformats.org/officeDocument/2006/relationships" xmlns:p="http://schemas.openxmlformats.org/presentationml/2006/main">
+  <p:cSld>
+    <p:spTree>
+      <p:nvGrpSpPr>
+        <p:cNvPr id="1" name=""/>
+        <p:cNvGrpSpPr/>
+        <p:nvPr/>
+      </p:nvGrpSpPr>
+      <p:grpSpPr>
+        <a:xfrm>
+          <a:off x="0" y="0"/>
+          <a:ext cx="0" cy="0"/>
+          <a:chOff x="0" y="0"/>
+          <a:chExt cx="0" cy="0"/>
+        </a:xfrm>
+      </p:grpSpPr>
+      <p:sp>
+        <p:nvSpPr>
+          <p:cNvPr id="2" name="Title 1">
+            <a:extLst>
+              <a:ext uri="{FF2B5EF4-FFF2-40B4-BE49-F238E27FC236}">
+                <a16:creationId xmlns:a16="http://schemas.microsoft.com/office/drawing/2014/main" id="{6BE12C6A-49ED-731B-2BFC-634C3B9D9FC9}"/>
+              </a:ext>
+            </a:extLst>
+          </p:cNvPr>
+          <p:cNvSpPr>
+            <a:spLocks noGrp="1"/>
+          </p:cNvSpPr>
+          <p:nvPr>
+            <p:ph type="title"/>
+          </p:nvPr>
+        </p:nvSpPr>
+        <p:spPr/>
+        <p:txBody>
+          <a:bodyPr/>
+          <a:lstStyle/>
+          <a:p>
+            <a:r>
+              <a:rPr lang="en-PT" dirty="0"/>
+              <a:t>Estacionariedade</a:t>
+            </a:r>
+          </a:p>
+        </p:txBody>
+      </p:sp>
+      <p:sp>
+        <p:nvSpPr>
+          <p:cNvPr id="3" name="Content Placeholder 2">
+            <a:extLst>
+              <a:ext uri="{FF2B5EF4-FFF2-40B4-BE49-F238E27FC236}">
+                <a16:creationId xmlns:a16="http://schemas.microsoft.com/office/drawing/2014/main" id="{97F087D4-6F93-F06E-BC3F-71063220D8FA}"/>
+              </a:ext>
+            </a:extLst>
+          </p:cNvPr>
+          <p:cNvSpPr>
+            <a:spLocks noGrp="1"/>
+          </p:cNvSpPr>
+          <p:nvPr>
+            <p:ph idx="1"/>
+          </p:nvPr>
+        </p:nvSpPr>
+        <p:spPr>
+          <a:xfrm>
+            <a:off x="1239619" y="2806749"/>
+            <a:ext cx="3365433" cy="3101983"/>
+          </a:xfrm>
+        </p:spPr>
+        <p:txBody>
+          <a:bodyPr>
+            <a:normAutofit lnSpcReduction="10000"/>
+          </a:bodyPr>
+          <a:lstStyle/>
+          <a:p>
+            <a:r>
+              <a:rPr lang="pt-PT" noProof="0" dirty="0" err="1"/>
+              <a:t>Heterocedasticidade</a:t>
+            </a:r>
+            <a:r>
+              <a:rPr lang="en-GB" dirty="0"/>
+              <a:t>? :</a:t>
+            </a:r>
+          </a:p>
+          <a:p>
+            <a:r>
+              <a:rPr lang="en-GB" dirty="0"/>
+              <a:t>T</a:t>
+            </a:r>
+            <a:r>
+              <a:rPr lang="en-PT" dirty="0"/>
+              <a:t>ransformação Box-Cox</a:t>
+            </a:r>
+          </a:p>
+          <a:p>
+            <a:r>
+              <a:rPr lang="en-GB" dirty="0"/>
+              <a:t>T</a:t>
+            </a:r>
+            <a:r>
+              <a:rPr lang="en-PT" dirty="0"/>
+              <a:t>este de Breusch-Pagan</a:t>
+            </a:r>
+          </a:p>
+          <a:p>
+            <a:pPr lvl="1"/>
+            <a:r>
+              <a:rPr lang="en-GB" dirty="0"/>
+              <a:t>P</a:t>
+            </a:r>
+            <a:r>
+              <a:rPr lang="en-PT" dirty="0"/>
+              <a:t>-valor de 0.55, não rej. </a:t>
+            </a:r>
+            <a:r>
+              <a:rPr lang="en-GB" dirty="0"/>
+              <a:t>h</a:t>
+            </a:r>
+            <a:r>
+              <a:rPr lang="en-PT" dirty="0"/>
+              <a:t>ip nula não há evidência de heterecodesticidade</a:t>
+            </a:r>
+          </a:p>
+          <a:p>
+            <a:endParaRPr lang="en-PT" dirty="0"/>
+          </a:p>
+          <a:p>
+            <a:r>
+              <a:rPr lang="en-PT" dirty="0"/>
+              <a:t>Nenhuma transformação aplicada</a:t>
+            </a:r>
+          </a:p>
+        </p:txBody>
+      </p:sp>
+      <p:sp>
+        <p:nvSpPr>
+          <p:cNvPr id="4" name="Slide Number Placeholder 3">
+            <a:extLst>
+              <a:ext uri="{FF2B5EF4-FFF2-40B4-BE49-F238E27FC236}">
+                <a16:creationId xmlns:a16="http://schemas.microsoft.com/office/drawing/2014/main" id="{ED5530C9-0EF3-2398-3382-43598D7FEDD3}"/>
+              </a:ext>
+            </a:extLst>
+          </p:cNvPr>
+          <p:cNvSpPr>
+            <a:spLocks noGrp="1"/>
+          </p:cNvSpPr>
+          <p:nvPr>
+            <p:ph type="sldNum" sz="quarter" idx="12"/>
+          </p:nvPr>
+        </p:nvSpPr>
+        <p:spPr/>
+        <p:txBody>
+          <a:bodyPr/>
+          <a:lstStyle/>
+          <a:p>
+            <a:fld id="{8A7A6979-0714-4377-B894-6BE4C2D6E202}" type="slidenum">
+              <a:rPr lang="en-US" smtClean="0"/>
+              <a:pPr/>
+              <a:t>4</a:t>
+            </a:fld>
+            <a:endParaRPr lang="en-US" dirty="0"/>
+          </a:p>
+        </p:txBody>
+      </p:sp>
+      <p:pic>
+        <p:nvPicPr>
+          <p:cNvPr id="5" name="Content Placeholder 5">
+            <a:extLst>
+              <a:ext uri="{FF2B5EF4-FFF2-40B4-BE49-F238E27FC236}">
+                <a16:creationId xmlns:a16="http://schemas.microsoft.com/office/drawing/2014/main" id="{1339A314-16FC-22F9-F808-BC4B6487A51A}"/>
+              </a:ext>
+            </a:extLst>
+          </p:cNvPr>
+          <p:cNvPicPr>
+            <a:picLocks noChangeAspect="1"/>
+          </p:cNvPicPr>
+          <p:nvPr/>
+        </p:nvPicPr>
+        <p:blipFill>
+          <a:blip r:embed="rId2"/>
+          <a:stretch>
+            <a:fillRect/>
+          </a:stretch>
+        </p:blipFill>
+        <p:spPr>
+          <a:xfrm>
+            <a:off x="7736633" y="2681506"/>
+            <a:ext cx="2892784" cy="3719294"/>
+          </a:xfrm>
+          <a:prstGeom prst="rect">
+            <a:avLst/>
+          </a:prstGeom>
+        </p:spPr>
+      </p:pic>
+    </p:spTree>
+    <p:extLst>
+      <p:ext uri="{BB962C8B-B14F-4D97-AF65-F5344CB8AC3E}">
+        <p14:creationId xmlns:p14="http://schemas.microsoft.com/office/powerpoint/2010/main" val="1679288293"/>
+      </p:ext>
+    </p:extLst>
+  </p:cSld>
+  <p:clrMapOvr>
+    <a:masterClrMapping/>
+  </p:clrMapOvr>
+</p:sld>
+</file>
+
+<file path=ppt/slides/slide5.xml><?xml version="1.0" encoding="utf-8"?>
+<p:sld xmlns:a="http://schemas.openxmlformats.org/drawingml/2006/main" xmlns:r="http://schemas.openxmlformats.org/officeDocument/2006/relationships" xmlns:p="http://schemas.openxmlformats.org/presentationml/2006/main">
+  <p:cSld>
+    <p:spTree>
+      <p:nvGrpSpPr>
+        <p:cNvPr id="1" name=""/>
+        <p:cNvGrpSpPr/>
+        <p:nvPr/>
+      </p:nvGrpSpPr>
+      <p:grpSpPr>
+        <a:xfrm>
+          <a:off x="0" y="0"/>
+          <a:ext cx="0" cy="0"/>
+          <a:chOff x="0" y="0"/>
+          <a:chExt cx="0" cy="0"/>
+        </a:xfrm>
+      </p:grpSpPr>
+      <p:sp>
+        <p:nvSpPr>
+          <p:cNvPr id="2" name="Title 1">
+            <a:extLst>
+              <a:ext uri="{FF2B5EF4-FFF2-40B4-BE49-F238E27FC236}">
+                <a16:creationId xmlns:a16="http://schemas.microsoft.com/office/drawing/2014/main" id="{53EA15AA-3161-96F6-D31C-0510F7EDE658}"/>
+              </a:ext>
+            </a:extLst>
+          </p:cNvPr>
+          <p:cNvSpPr>
+            <a:spLocks noGrp="1"/>
+          </p:cNvSpPr>
+          <p:nvPr>
+            <p:ph type="title"/>
+          </p:nvPr>
+        </p:nvSpPr>
+        <p:spPr/>
+        <p:txBody>
+          <a:bodyPr/>
+          <a:lstStyle/>
+          <a:p>
+            <a:r>
+              <a:rPr lang="en-PT" dirty="0"/>
+              <a:t>Estacionariedade</a:t>
+            </a:r>
+          </a:p>
+        </p:txBody>
+      </p:sp>
+      <p:sp>
+        <p:nvSpPr>
+          <p:cNvPr id="3" name="Content Placeholder 2">
+            <a:extLst>
+              <a:ext uri="{FF2B5EF4-FFF2-40B4-BE49-F238E27FC236}">
+                <a16:creationId xmlns:a16="http://schemas.microsoft.com/office/drawing/2014/main" id="{2226F941-CDEA-91CA-8C4D-C19BFC3B1B46}"/>
+              </a:ext>
+            </a:extLst>
+          </p:cNvPr>
+          <p:cNvSpPr>
+            <a:spLocks noGrp="1"/>
+          </p:cNvSpPr>
+          <p:nvPr>
+            <p:ph idx="1"/>
+          </p:nvPr>
+        </p:nvSpPr>
+        <p:spPr>
+          <a:xfrm>
+            <a:off x="479454" y="2296521"/>
+            <a:ext cx="7729728" cy="402611"/>
+          </a:xfrm>
+        </p:spPr>
+        <p:txBody>
+          <a:bodyPr/>
+          <a:lstStyle/>
+          <a:p>
+            <a:r>
+              <a:rPr lang="en-GB" dirty="0"/>
+              <a:t>E</a:t>
+            </a:r>
+            <a:r>
+              <a:rPr lang="en-PT" dirty="0"/>
+              <a:t>m termos de sazonalidade e tendência:</a:t>
+            </a:r>
+          </a:p>
+        </p:txBody>
+      </p:sp>
+      <p:sp>
+        <p:nvSpPr>
+          <p:cNvPr id="4" name="Slide Number Placeholder 3">
+            <a:extLst>
+              <a:ext uri="{FF2B5EF4-FFF2-40B4-BE49-F238E27FC236}">
+                <a16:creationId xmlns:a16="http://schemas.microsoft.com/office/drawing/2014/main" id="{3013FAAE-B77D-D4D1-1EFE-A354527BCB5B}"/>
+              </a:ext>
+            </a:extLst>
+          </p:cNvPr>
+          <p:cNvSpPr>
+            <a:spLocks noGrp="1"/>
+          </p:cNvSpPr>
+          <p:nvPr>
+            <p:ph type="sldNum" sz="quarter" idx="12"/>
+          </p:nvPr>
+        </p:nvSpPr>
+        <p:spPr/>
+        <p:txBody>
+          <a:bodyPr/>
+          <a:lstStyle/>
+          <a:p>
+            <a:fld id="{8A7A6979-0714-4377-B894-6BE4C2D6E202}" type="slidenum">
+              <a:rPr lang="en-US" smtClean="0"/>
+              <a:pPr/>
+              <a:t>5</a:t>
+            </a:fld>
+            <a:endParaRPr lang="en-US" dirty="0"/>
+          </a:p>
+        </p:txBody>
+      </p:sp>
+      <p:pic>
+        <p:nvPicPr>
+          <p:cNvPr id="5" name="Content Placeholder 5">
+            <a:extLst>
+              <a:ext uri="{FF2B5EF4-FFF2-40B4-BE49-F238E27FC236}">
+                <a16:creationId xmlns:a16="http://schemas.microsoft.com/office/drawing/2014/main" id="{886311BB-016B-BC49-7F9B-F1A0F0936A0B}"/>
+              </a:ext>
+            </a:extLst>
+          </p:cNvPr>
+          <p:cNvPicPr>
+            <a:picLocks noChangeAspect="1"/>
+          </p:cNvPicPr>
+          <p:nvPr/>
+        </p:nvPicPr>
+        <p:blipFill>
+          <a:blip r:embed="rId2"/>
+          <a:stretch>
+            <a:fillRect/>
+          </a:stretch>
+        </p:blipFill>
+        <p:spPr>
+          <a:xfrm>
+            <a:off x="479454" y="2922114"/>
+            <a:ext cx="3618970" cy="3101975"/>
+          </a:xfrm>
+          <a:prstGeom prst="rect">
+            <a:avLst/>
+          </a:prstGeom>
+        </p:spPr>
+      </p:pic>
+      <p:pic>
+        <p:nvPicPr>
+          <p:cNvPr id="7" name="Picture 6">
+            <a:extLst>
+              <a:ext uri="{FF2B5EF4-FFF2-40B4-BE49-F238E27FC236}">
+                <a16:creationId xmlns:a16="http://schemas.microsoft.com/office/drawing/2014/main" id="{562CFB73-040D-F801-3359-DE4ACD5035E0}"/>
+              </a:ext>
+            </a:extLst>
+          </p:cNvPr>
+          <p:cNvPicPr>
+            <a:picLocks noChangeAspect="1"/>
+          </p:cNvPicPr>
+          <p:nvPr/>
+        </p:nvPicPr>
+        <p:blipFill>
+          <a:blip r:embed="rId3"/>
+          <a:stretch>
+            <a:fillRect/>
+          </a:stretch>
+        </p:blipFill>
+        <p:spPr>
+          <a:xfrm>
+            <a:off x="4286514" y="2922114"/>
+            <a:ext cx="3618971" cy="3101975"/>
+          </a:xfrm>
+          <a:prstGeom prst="rect">
+            <a:avLst/>
+          </a:prstGeom>
+        </p:spPr>
+      </p:pic>
+      <p:pic>
+        <p:nvPicPr>
+          <p:cNvPr id="9" name="Picture 8">
+            <a:extLst>
+              <a:ext uri="{FF2B5EF4-FFF2-40B4-BE49-F238E27FC236}">
+                <a16:creationId xmlns:a16="http://schemas.microsoft.com/office/drawing/2014/main" id="{05646554-9501-62CC-C243-5A559C4DC4BF}"/>
+              </a:ext>
+            </a:extLst>
+          </p:cNvPr>
+          <p:cNvPicPr>
+            <a:picLocks noChangeAspect="1"/>
+          </p:cNvPicPr>
+          <p:nvPr/>
+        </p:nvPicPr>
+        <p:blipFill>
+          <a:blip r:embed="rId4"/>
+          <a:stretch>
+            <a:fillRect/>
+          </a:stretch>
+        </p:blipFill>
+        <p:spPr>
+          <a:xfrm>
+            <a:off x="8100605" y="2928140"/>
+            <a:ext cx="3611941" cy="3095949"/>
+          </a:xfrm>
+          <a:prstGeom prst="rect">
+            <a:avLst/>
+          </a:prstGeom>
+        </p:spPr>
+      </p:pic>
+    </p:spTree>
+    <p:extLst>
+      <p:ext uri="{BB962C8B-B14F-4D97-AF65-F5344CB8AC3E}">
+        <p14:creationId xmlns:p14="http://schemas.microsoft.com/office/powerpoint/2010/main" val="1126296036"/>
+      </p:ext>
+    </p:extLst>
+  </p:cSld>
+  <p:clrMapOvr>
+    <a:masterClrMapping/>
+  </p:clrMapOvr>
+</p:sld>
+</file>
+
+<file path=ppt/slides/slide6.xml><?xml version="1.0" encoding="utf-8"?>
+<p:sld xmlns:a="http://schemas.openxmlformats.org/drawingml/2006/main" xmlns:r="http://schemas.openxmlformats.org/officeDocument/2006/relationships" xmlns:p="http://schemas.openxmlformats.org/presentationml/2006/main">
+  <p:cSld>
+    <p:spTree>
+      <p:nvGrpSpPr>
+        <p:cNvPr id="1" name=""/>
+        <p:cNvGrpSpPr/>
+        <p:nvPr/>
+      </p:nvGrpSpPr>
+      <p:grpSpPr>
+        <a:xfrm>
+          <a:off x="0" y="0"/>
+          <a:ext cx="0" cy="0"/>
+          <a:chOff x="0" y="0"/>
+          <a:chExt cx="0" cy="0"/>
+        </a:xfrm>
+      </p:grpSpPr>
+      <p:sp>
+        <p:nvSpPr>
+          <p:cNvPr id="2" name="Title 1">
+            <a:extLst>
+              <a:ext uri="{FF2B5EF4-FFF2-40B4-BE49-F238E27FC236}">
+                <a16:creationId xmlns:a16="http://schemas.microsoft.com/office/drawing/2014/main" id="{49B78A76-762F-4B54-C047-3CE1AA8095B6}"/>
+              </a:ext>
+            </a:extLst>
+          </p:cNvPr>
+          <p:cNvSpPr>
+            <a:spLocks noGrp="1"/>
+          </p:cNvSpPr>
+          <p:nvPr>
+            <p:ph type="title"/>
+          </p:nvPr>
+        </p:nvSpPr>
+        <p:spPr/>
+        <p:txBody>
+          <a:bodyPr/>
+          <a:lstStyle/>
+          <a:p>
+            <a:r>
+              <a:rPr lang="en-PT" dirty="0"/>
+              <a:t>Estacionariedade</a:t>
+            </a:r>
+          </a:p>
+        </p:txBody>
+      </p:sp>
+      <p:sp>
+        <p:nvSpPr>
+          <p:cNvPr id="3" name="Content Placeholder 2">
+            <a:extLst>
+              <a:ext uri="{FF2B5EF4-FFF2-40B4-BE49-F238E27FC236}">
+                <a16:creationId xmlns:a16="http://schemas.microsoft.com/office/drawing/2014/main" id="{2F03A18E-A61C-4CC5-A877-3160AF7207FD}"/>
+              </a:ext>
+            </a:extLst>
+          </p:cNvPr>
+          <p:cNvSpPr>
+            <a:spLocks noGrp="1"/>
+          </p:cNvSpPr>
+          <p:nvPr>
+            <p:ph idx="1"/>
+          </p:nvPr>
+        </p:nvSpPr>
+        <p:spPr/>
+        <p:txBody>
+          <a:bodyPr/>
+          <a:lstStyle/>
+          <a:p>
+            <a:r>
+              <a:rPr lang="en-PT" dirty="0"/>
+              <a:t>Dickey-Fuller aumentado</a:t>
+            </a:r>
+          </a:p>
+          <a:p>
+            <a:r>
+              <a:rPr lang="en-PT" dirty="0"/>
+              <a:t>KPSS</a:t>
+            </a:r>
+          </a:p>
+          <a:p>
+            <a:endParaRPr lang="en-PT" dirty="0"/>
+          </a:p>
+          <a:p>
+            <a:r>
+              <a:rPr lang="en-PT" dirty="0"/>
+              <a:t>Ambos indicam que série original não é estacionária, mas a difereniação de ordem 1 e 12 tornam-a estacionária</a:t>
+            </a:r>
+          </a:p>
+          <a:p>
+            <a:r>
+              <a:rPr lang="en-PT" dirty="0"/>
+              <a:t>(print output R)</a:t>
+            </a:r>
+          </a:p>
+        </p:txBody>
+      </p:sp>
+      <p:sp>
+        <p:nvSpPr>
+          <p:cNvPr id="4" name="Slide Number Placeholder 3">
+            <a:extLst>
+              <a:ext uri="{FF2B5EF4-FFF2-40B4-BE49-F238E27FC236}">
+                <a16:creationId xmlns:a16="http://schemas.microsoft.com/office/drawing/2014/main" id="{6733342A-FA6A-95F8-378F-4F4CC78FF43C}"/>
+              </a:ext>
+            </a:extLst>
+          </p:cNvPr>
+          <p:cNvSpPr>
+            <a:spLocks noGrp="1"/>
+          </p:cNvSpPr>
+          <p:nvPr>
+            <p:ph type="sldNum" sz="quarter" idx="12"/>
+          </p:nvPr>
+        </p:nvSpPr>
+        <p:spPr/>
+        <p:txBody>
+          <a:bodyPr/>
+          <a:lstStyle/>
+          <a:p>
+            <a:fld id="{8A7A6979-0714-4377-B894-6BE4C2D6E202}" type="slidenum">
+              <a:rPr lang="en-US" smtClean="0"/>
+              <a:pPr/>
+              <a:t>6</a:t>
+            </a:fld>
+            <a:endParaRPr lang="en-US" dirty="0"/>
+          </a:p>
+        </p:txBody>
+      </p:sp>
+    </p:spTree>
+    <p:extLst>
+      <p:ext uri="{BB962C8B-B14F-4D97-AF65-F5344CB8AC3E}">
+        <p14:creationId xmlns:p14="http://schemas.microsoft.com/office/powerpoint/2010/main" val="4059358144"/>
+      </p:ext>
+    </p:extLst>
+  </p:cSld>
+  <p:clrMapOvr>
+    <a:masterClrMapping/>
+  </p:clrMapOvr>
+</p:sld>
+</file>
+
+<file path=ppt/slides/slide7.xml><?xml version="1.0" encoding="utf-8"?>
+<p:sld xmlns:a="http://schemas.openxmlformats.org/drawingml/2006/main" xmlns:r="http://schemas.openxmlformats.org/officeDocument/2006/relationships" xmlns:p="http://schemas.openxmlformats.org/presentationml/2006/main">
+  <p:cSld>
+    <p:spTree>
+      <p:nvGrpSpPr>
+        <p:cNvPr id="1" name=""/>
+        <p:cNvGrpSpPr/>
+        <p:nvPr/>
+      </p:nvGrpSpPr>
+      <p:grpSpPr>
+        <a:xfrm>
+          <a:off x="0" y="0"/>
+          <a:ext cx="0" cy="0"/>
+          <a:chOff x="0" y="0"/>
+          <a:chExt cx="0" cy="0"/>
+        </a:xfrm>
+      </p:grpSpPr>
+      <p:sp>
+        <p:nvSpPr>
+          <p:cNvPr id="2" name="Title 1">
+            <a:extLst>
+              <a:ext uri="{FF2B5EF4-FFF2-40B4-BE49-F238E27FC236}">
+                <a16:creationId xmlns:a16="http://schemas.microsoft.com/office/drawing/2014/main" id="{0F2D7981-DD65-B480-17CF-9BBAC67546C3}"/>
+              </a:ext>
+            </a:extLst>
+          </p:cNvPr>
+          <p:cNvSpPr>
+            <a:spLocks noGrp="1"/>
+          </p:cNvSpPr>
+          <p:nvPr>
+            <p:ph type="title"/>
+          </p:nvPr>
+        </p:nvSpPr>
+        <p:spPr/>
+        <p:txBody>
+          <a:bodyPr/>
+          <a:lstStyle/>
+          <a:p>
+            <a:r>
+              <a:rPr lang="pt-PT" dirty="0"/>
+              <a:t>Propostas de Modelos</a:t>
+            </a:r>
+            <a:endParaRPr lang="en-PT" dirty="0"/>
+          </a:p>
+        </p:txBody>
+      </p:sp>
+      <p:sp>
+        <p:nvSpPr>
+          <p:cNvPr id="3" name="Content Placeholder 2">
+            <a:extLst>
+              <a:ext uri="{FF2B5EF4-FFF2-40B4-BE49-F238E27FC236}">
+                <a16:creationId xmlns:a16="http://schemas.microsoft.com/office/drawing/2014/main" id="{1D967C8D-DAFA-6632-8909-60AD0521B94B}"/>
+              </a:ext>
+            </a:extLst>
+          </p:cNvPr>
+          <p:cNvSpPr>
+            <a:spLocks noGrp="1"/>
+          </p:cNvSpPr>
+          <p:nvPr>
+            <p:ph idx="1"/>
+          </p:nvPr>
+        </p:nvSpPr>
+        <p:spPr/>
+        <p:txBody>
+          <a:bodyPr/>
+          <a:lstStyle/>
+          <a:p>
+            <a:r>
+              <a:rPr lang="en-GB" dirty="0"/>
+              <a:t>S</a:t>
+            </a:r>
+            <a:r>
+              <a:rPr lang="en-PT" dirty="0"/>
+              <a:t>arima</a:t>
+            </a:r>
+          </a:p>
+          <a:p>
+            <a:r>
+              <a:rPr lang="en-GB" dirty="0"/>
+              <a:t>G</a:t>
+            </a:r>
+            <a:r>
+              <a:rPr lang="en-PT" dirty="0"/>
+              <a:t>arch</a:t>
+            </a:r>
+          </a:p>
+          <a:p>
+            <a:r>
+              <a:rPr lang="en-GB" dirty="0"/>
+              <a:t>E</a:t>
+            </a:r>
+            <a:r>
+              <a:rPr lang="en-PT" dirty="0"/>
+              <a:t>ts</a:t>
+            </a:r>
+          </a:p>
+          <a:p>
+            <a:r>
+              <a:rPr lang="en-PT" dirty="0"/>
+              <a:t>stlm</a:t>
+            </a:r>
+          </a:p>
+        </p:txBody>
+      </p:sp>
+      <p:sp>
+        <p:nvSpPr>
+          <p:cNvPr id="4" name="Slide Number Placeholder 3">
+            <a:extLst>
+              <a:ext uri="{FF2B5EF4-FFF2-40B4-BE49-F238E27FC236}">
+                <a16:creationId xmlns:a16="http://schemas.microsoft.com/office/drawing/2014/main" id="{59245113-9994-6960-68C9-5A5F2739912C}"/>
+              </a:ext>
+            </a:extLst>
+          </p:cNvPr>
+          <p:cNvSpPr>
+            <a:spLocks noGrp="1"/>
+          </p:cNvSpPr>
+          <p:nvPr>
+            <p:ph type="sldNum" sz="quarter" idx="12"/>
+          </p:nvPr>
+        </p:nvSpPr>
+        <p:spPr/>
+        <p:txBody>
+          <a:bodyPr/>
+          <a:lstStyle/>
+          <a:p>
+            <a:fld id="{8A7A6979-0714-4377-B894-6BE4C2D6E202}" type="slidenum">
+              <a:rPr lang="en-US" smtClean="0"/>
+              <a:pPr/>
+              <a:t>7</a:t>
+            </a:fld>
+            <a:endParaRPr lang="en-US" dirty="0"/>
+          </a:p>
+        </p:txBody>
+      </p:sp>
+    </p:spTree>
+    <p:extLst>
+      <p:ext uri="{BB962C8B-B14F-4D97-AF65-F5344CB8AC3E}">
+        <p14:creationId xmlns:p14="http://schemas.microsoft.com/office/powerpoint/2010/main" val="339339475"/>
+      </p:ext>
+    </p:extLst>
+  </p:cSld>
+  <p:clrMapOvr>
+    <a:masterClrMapping/>
+  </p:clrMapOvr>
+</p:sld>
+</file>
+
+<file path=ppt/slides/slide8.xml><?xml version="1.0" encoding="utf-8"?>
+<p:sld xmlns:a="http://schemas.openxmlformats.org/drawingml/2006/main" xmlns:r="http://schemas.openxmlformats.org/officeDocument/2006/relationships" xmlns:p="http://schemas.openxmlformats.org/presentationml/2006/main">
+  <p:cSld>
+    <p:spTree>
+      <p:nvGrpSpPr>
+        <p:cNvPr id="1" name=""/>
+        <p:cNvGrpSpPr/>
+        <p:nvPr/>
+      </p:nvGrpSpPr>
+      <p:grpSpPr>
+        <a:xfrm>
+          <a:off x="0" y="0"/>
+          <a:ext cx="0" cy="0"/>
+          <a:chOff x="0" y="0"/>
+          <a:chExt cx="0" cy="0"/>
+        </a:xfrm>
+      </p:grpSpPr>
+      <p:sp>
+        <p:nvSpPr>
+          <p:cNvPr id="2" name="Title 1">
+            <a:extLst>
+              <a:ext uri="{FF2B5EF4-FFF2-40B4-BE49-F238E27FC236}">
+                <a16:creationId xmlns:a16="http://schemas.microsoft.com/office/drawing/2014/main" id="{0F2E2891-2740-CDD1-8465-A07A4E46B3D6}"/>
+              </a:ext>
+            </a:extLst>
+          </p:cNvPr>
+          <p:cNvSpPr>
+            <a:spLocks noGrp="1"/>
+          </p:cNvSpPr>
+          <p:nvPr>
+            <p:ph type="title"/>
+          </p:nvPr>
+        </p:nvSpPr>
+        <p:spPr/>
+        <p:txBody>
+          <a:bodyPr/>
+          <a:lstStyle/>
+          <a:p>
+            <a:r>
+              <a:rPr lang="en-PT" dirty="0"/>
+              <a:t>Sarima</a:t>
+            </a:r>
+          </a:p>
+        </p:txBody>
+      </p:sp>
+      <p:sp>
+        <p:nvSpPr>
+          <p:cNvPr id="3" name="Content Placeholder 2">
+            <a:extLst>
+              <a:ext uri="{FF2B5EF4-FFF2-40B4-BE49-F238E27FC236}">
+                <a16:creationId xmlns:a16="http://schemas.microsoft.com/office/drawing/2014/main" id="{27B4387D-FF72-B553-33E1-7FE79CD4B8B8}"/>
+              </a:ext>
+            </a:extLst>
+          </p:cNvPr>
+          <p:cNvSpPr>
+            <a:spLocks noGrp="1"/>
+          </p:cNvSpPr>
+          <p:nvPr>
+            <p:ph idx="1"/>
+          </p:nvPr>
+        </p:nvSpPr>
+        <p:spPr>
+          <a:xfrm>
+            <a:off x="6271806" y="2638052"/>
+            <a:ext cx="4669996" cy="3101983"/>
+          </a:xfrm>
+        </p:spPr>
+        <p:txBody>
+          <a:bodyPr/>
+          <a:lstStyle/>
+          <a:p>
+            <a:pPr marL="0" indent="0">
+              <a:buNone/>
+            </a:pPr>
+            <a:r>
+              <a:rPr lang="en-PT" dirty="0"/>
+              <a:t>3 modelos:</a:t>
+            </a:r>
+          </a:p>
+          <a:p>
+            <a:r>
+              <a:rPr lang="en-PT" dirty="0"/>
+              <a:t>Tendo em conta análise ACF e PACF: SARIMA(1,1,1)(1,1,1)[12]</a:t>
+            </a:r>
+          </a:p>
+          <a:p>
+            <a:r>
+              <a:rPr lang="en-PT" dirty="0"/>
+              <a:t>Análise sistemática, critério AICc: SARIMA(2,0,2)(2,1,0)[12]</a:t>
+            </a:r>
+          </a:p>
+          <a:p>
+            <a:r>
+              <a:rPr lang="en-PT" dirty="0"/>
+              <a:t>Análise sistemática, critério AICc, forçando d=D=1: SARIMA(0,1,2)(3,1,0)[12]</a:t>
+            </a:r>
+          </a:p>
+        </p:txBody>
+      </p:sp>
+      <p:sp>
+        <p:nvSpPr>
+          <p:cNvPr id="4" name="Slide Number Placeholder 3">
+            <a:extLst>
+              <a:ext uri="{FF2B5EF4-FFF2-40B4-BE49-F238E27FC236}">
+                <a16:creationId xmlns:a16="http://schemas.microsoft.com/office/drawing/2014/main" id="{9072EFE0-9E35-4258-49A5-8DBE620B8F3F}"/>
+              </a:ext>
+            </a:extLst>
+          </p:cNvPr>
+          <p:cNvSpPr>
+            <a:spLocks noGrp="1"/>
+          </p:cNvSpPr>
+          <p:nvPr>
+            <p:ph type="sldNum" sz="quarter" idx="12"/>
+          </p:nvPr>
+        </p:nvSpPr>
+        <p:spPr/>
+        <p:txBody>
+          <a:bodyPr/>
+          <a:lstStyle/>
+          <a:p>
+            <a:fld id="{8A7A6979-0714-4377-B894-6BE4C2D6E202}" type="slidenum">
+              <a:rPr lang="en-US" smtClean="0"/>
+              <a:pPr/>
+              <a:t>8</a:t>
+            </a:fld>
+            <a:endParaRPr lang="en-US" dirty="0"/>
+          </a:p>
+        </p:txBody>
+      </p:sp>
+      <p:pic>
+        <p:nvPicPr>
+          <p:cNvPr id="5" name="Content Placeholder 5">
+            <a:extLst>
+              <a:ext uri="{FF2B5EF4-FFF2-40B4-BE49-F238E27FC236}">
+                <a16:creationId xmlns:a16="http://schemas.microsoft.com/office/drawing/2014/main" id="{C11B3E53-89CF-FE67-FAC5-3CE1E34E4FF1}"/>
+              </a:ext>
+            </a:extLst>
+          </p:cNvPr>
+          <p:cNvPicPr>
+            <a:picLocks noChangeAspect="1"/>
+          </p:cNvPicPr>
+          <p:nvPr/>
+        </p:nvPicPr>
+        <p:blipFill>
+          <a:blip r:embed="rId2"/>
+          <a:stretch>
+            <a:fillRect/>
+          </a:stretch>
+        </p:blipFill>
+        <p:spPr>
+          <a:xfrm>
+            <a:off x="1819590" y="2791333"/>
+            <a:ext cx="3618970" cy="3101975"/>
+          </a:xfrm>
+          <a:prstGeom prst="rect">
+            <a:avLst/>
+          </a:prstGeom>
+        </p:spPr>
+      </p:pic>
+    </p:spTree>
+    <p:extLst>
+      <p:ext uri="{BB962C8B-B14F-4D97-AF65-F5344CB8AC3E}">
+        <p14:creationId xmlns:p14="http://schemas.microsoft.com/office/powerpoint/2010/main" val="2769513798"/>
+      </p:ext>
+    </p:extLst>
+  </p:cSld>
+  <p:clrMapOvr>
+    <a:masterClrMapping/>
+  </p:clrMapOvr>
+</p:sld>
+</file>
+
+<file path=ppt/slides/slide9.xml><?xml version="1.0" encoding="utf-8"?>
+<p:sld xmlns:a="http://schemas.openxmlformats.org/drawingml/2006/main" xmlns:r="http://schemas.openxmlformats.org/officeDocument/2006/relationships" xmlns:p="http://schemas.openxmlformats.org/presentationml/2006/main">
+  <p:cSld>
+    <p:spTree>
+      <p:nvGrpSpPr>
+        <p:cNvPr id="1" name=""/>
+        <p:cNvGrpSpPr/>
+        <p:nvPr/>
+      </p:nvGrpSpPr>
+      <p:grpSpPr>
+        <a:xfrm>
+          <a:off x="0" y="0"/>
+          <a:ext cx="0" cy="0"/>
+          <a:chOff x="0" y="0"/>
+          <a:chExt cx="0" cy="0"/>
+        </a:xfrm>
+      </p:grpSpPr>
+      <p:sp>
+        <p:nvSpPr>
+          <p:cNvPr id="2" name="Title 1">
+            <a:extLst>
+              <a:ext uri="{FF2B5EF4-FFF2-40B4-BE49-F238E27FC236}">
+                <a16:creationId xmlns:a16="http://schemas.microsoft.com/office/drawing/2014/main" id="{A4805735-2BE1-48A4-C705-826ADDAA3E5D}"/>
+              </a:ext>
+            </a:extLst>
+          </p:cNvPr>
+          <p:cNvSpPr>
+            <a:spLocks noGrp="1"/>
+          </p:cNvSpPr>
+          <p:nvPr>
+            <p:ph type="title"/>
+          </p:nvPr>
+        </p:nvSpPr>
+        <p:spPr/>
+        <p:txBody>
+          <a:bodyPr/>
+          <a:lstStyle/>
+          <a:p>
+            <a:r>
+              <a:rPr lang="en-PT" dirty="0"/>
+              <a:t>Sarima</a:t>
+            </a:r>
+          </a:p>
+        </p:txBody>
+      </p:sp>
+      <p:sp>
+        <p:nvSpPr>
+          <p:cNvPr id="4" name="Slide Number Placeholder 3">
+            <a:extLst>
+              <a:ext uri="{FF2B5EF4-FFF2-40B4-BE49-F238E27FC236}">
+                <a16:creationId xmlns:a16="http://schemas.microsoft.com/office/drawing/2014/main" id="{AF31EAF6-7345-2971-7D85-A8C9BEB5573F}"/>
+              </a:ext>
+            </a:extLst>
+          </p:cNvPr>
+          <p:cNvSpPr>
+            <a:spLocks noGrp="1"/>
+          </p:cNvSpPr>
+          <p:nvPr>
+            <p:ph type="sldNum" sz="quarter" idx="12"/>
+          </p:nvPr>
+        </p:nvSpPr>
+        <p:spPr/>
+        <p:txBody>
+          <a:bodyPr/>
+          <a:lstStyle/>
+          <a:p>
+            <a:fld id="{8A7A6979-0714-4377-B894-6BE4C2D6E202}" type="slidenum">
+              <a:rPr lang="en-US" smtClean="0"/>
+              <a:pPr/>
+              <a:t>9</a:t>
+            </a:fld>
+            <a:endParaRPr lang="en-US" dirty="0"/>
+          </a:p>
+        </p:txBody>
+      </p:sp>
+      <p:sp>
+        <p:nvSpPr>
+          <p:cNvPr id="8" name="Content Placeholder 7">
+            <a:extLst>
+              <a:ext uri="{FF2B5EF4-FFF2-40B4-BE49-F238E27FC236}">
+                <a16:creationId xmlns:a16="http://schemas.microsoft.com/office/drawing/2014/main" id="{B3E89611-D7A2-21B7-9A84-681EDCC1D212}"/>
+              </a:ext>
+            </a:extLst>
+          </p:cNvPr>
+          <p:cNvSpPr>
+            <a:spLocks noGrp="1"/>
+          </p:cNvSpPr>
+          <p:nvPr>
+            <p:ph idx="1"/>
+          </p:nvPr>
+        </p:nvSpPr>
+        <p:spPr/>
+        <p:txBody>
+          <a:bodyPr/>
+          <a:lstStyle/>
+          <a:p>
+            <a:r>
+              <a:rPr lang="en-PT" dirty="0"/>
+              <a:t>Apesar dos três modelos aparenteram uma boa modelação dos dados de treino…</a:t>
+            </a:r>
+          </a:p>
+        </p:txBody>
+      </p:sp>
+      <p:pic>
+        <p:nvPicPr>
+          <p:cNvPr id="9" name="Picture 8">
+            <a:extLst>
+              <a:ext uri="{FF2B5EF4-FFF2-40B4-BE49-F238E27FC236}">
+                <a16:creationId xmlns:a16="http://schemas.microsoft.com/office/drawing/2014/main" id="{C842795D-9CB7-1E0B-4BB0-9BB37E6B75A1}"/>
+              </a:ext>
+            </a:extLst>
+          </p:cNvPr>
+          <p:cNvPicPr>
+            <a:picLocks noChangeAspect="1"/>
+          </p:cNvPicPr>
+          <p:nvPr/>
+        </p:nvPicPr>
+        <p:blipFill>
+          <a:blip r:embed="rId2"/>
+          <a:stretch>
+            <a:fillRect/>
+          </a:stretch>
+        </p:blipFill>
+        <p:spPr>
+          <a:xfrm>
+            <a:off x="7062675" y="2803632"/>
+            <a:ext cx="3879127" cy="2770805"/>
+          </a:xfrm>
+          <a:prstGeom prst="rect">
+            <a:avLst/>
+          </a:prstGeom>
+        </p:spPr>
+      </p:pic>
+    </p:spTree>
+    <p:extLst>
+      <p:ext uri="{BB962C8B-B14F-4D97-AF65-F5344CB8AC3E}">
+        <p14:creationId xmlns:p14="http://schemas.microsoft.com/office/powerpoint/2010/main" val="3223321"/>
       </p:ext>
     </p:extLst>
   </p:cSld>
